--- a/RADAR_Presentation.pptx
+++ b/RADAR_Presentation.pptx
@@ -3295,7 +3295,7 @@
               </a:defRPr>
             </a:pPr>
             <a:r>
-              <a:t>MIT Critical Data | Dr. Leo Anthony Celi</a:t>
+              <a:t>MIT Critical Data |</a:t>
             </a:r>
           </a:p>
         </p:txBody>
@@ -6717,7 +6717,7 @@
               </a:defRPr>
             </a:pPr>
             <a:r>
-              <a:t>MIT Critical Data — Dr. Leo Anthony Celi</a:t>
+              <a:t>MIT Critical Data —</a:t>
             </a:r>
           </a:p>
         </p:txBody>

--- a/RADAR_Presentation.pptx
+++ b/RADAR_Presentation.pptx
@@ -19,6 +19,7 @@
     <p:sldId id="267" r:id="rId18"/>
     <p:sldId id="268" r:id="rId19"/>
     <p:sldId id="269" r:id="rId20"/>
+    <p:sldId id="270" r:id="rId21"/>
   </p:sldIdLst>
   <p:sldSz cx="12191695" cy="6858000" type="screen4x3"/>
   <p:notesSz cx="6858000" cy="9144000"/>
@@ -3295,7 +3296,7 @@
               </a:defRPr>
             </a:pPr>
             <a:r>
-              <a:t>MIT Critical Data |</a:t>
+              <a:t>MIT Critical Data</a:t>
             </a:r>
           </a:p>
         </p:txBody>
@@ -3367,7 +3368,7 @@
               </a:defRPr>
             </a:pPr>
             <a:r>
-              <a:t>1 / 14</a:t>
+              <a:t>1/15</a:t>
             </a:r>
           </a:p>
         </p:txBody>
@@ -3472,7 +3473,7 @@
               </a:defRPr>
             </a:pPr>
             <a:r>
-              <a:t>Results: AASLD HCC 2023</a:t>
+              <a:t>Results: AACE Osteoporosis 2020</a:t>
             </a:r>
           </a:p>
         </p:txBody>
@@ -3508,7 +3509,7 @@
               </a:defRPr>
             </a:pPr>
             <a:r>
-              <a:t>AASLD Practice Guidance on prevention, diagnosis, and treatment of hepatocellular carcinoma</a:t>
+              <a:t>American Association of Clinical Endocrinologists/American College of Endocrinology Clinical Practic</a:t>
             </a:r>
           </a:p>
         </p:txBody>
@@ -3659,7 +3660,7 @@
               </a:defRPr>
             </a:pPr>
             <a:r>
-              <a:t>318</a:t>
+              <a:t>343</a:t>
             </a:r>
           </a:p>
         </p:txBody>
@@ -3803,7 +3804,7 @@
               </a:defRPr>
             </a:pPr>
             <a:r>
-              <a:t>60</a:t>
+              <a:t>25</a:t>
             </a:r>
           </a:p>
         </p:txBody>
@@ -3875,7 +3876,7 @@
               </a:defRPr>
             </a:pPr>
             <a:r>
-              <a:t>14,542,003</a:t>
+              <a:t>256,055</a:t>
             </a:r>
           </a:p>
         </p:txBody>
@@ -3911,7 +3912,7 @@
               </a:defRPr>
             </a:pPr>
             <a:r>
-              <a:t>Bias Score</a:t>
+              <a:t>Bias</a:t>
             </a:r>
           </a:p>
         </p:txBody>
@@ -3947,7 +3948,7 @@
               </a:defRPr>
             </a:pPr>
             <a:r>
-              <a:t>69%</a:t>
+              <a:t>79%</a:t>
             </a:r>
           </a:p>
         </p:txBody>
@@ -4131,7 +4132,7 @@
                     <a:bodyPr/>
                     <a:lstStyle/>
                     <a:p>
-                      <a:pPr algn="l">
+                      <a:pPr>
                         <a:defRPr sz="1200">
                           <a:solidFill>
                             <a:srgbClr val="1A1A1A"/>
@@ -4150,7 +4151,7 @@
                     <a:bodyPr/>
                     <a:lstStyle/>
                     <a:p>
-                      <a:pPr algn="ctr">
+                      <a:pPr>
                         <a:defRPr sz="1200">
                           <a:solidFill>
                             <a:srgbClr val="1A1A1A"/>
@@ -4169,7 +4170,7 @@
                     <a:bodyPr/>
                     <a:lstStyle/>
                     <a:p>
-                      <a:pPr algn="ctr">
+                      <a:pPr>
                         <a:defRPr sz="1200">
                           <a:solidFill>
                             <a:srgbClr val="1A1A1A"/>
@@ -4177,7 +4178,7 @@
                         </a:defRPr>
                       </a:pPr>
                       <a:r>
-                        <a:t>10%</a:t>
+                        <a:t>4%</a:t>
                       </a:r>
                     </a:p>
                   </a:txBody>
@@ -4190,7 +4191,7 @@
                     <a:bodyPr/>
                     <a:lstStyle/>
                     <a:p>
-                      <a:pPr algn="l">
+                      <a:pPr>
                         <a:defRPr sz="1200">
                           <a:solidFill>
                             <a:srgbClr val="1A1A1A"/>
@@ -4209,7 +4210,7 @@
                     <a:bodyPr/>
                     <a:lstStyle/>
                     <a:p>
-                      <a:pPr algn="ctr">
+                      <a:pPr>
                         <a:defRPr sz="1200">
                           <a:solidFill>
                             <a:srgbClr val="1A1A1A"/>
@@ -4217,7 +4218,7 @@
                         </a:defRPr>
                       </a:pPr>
                       <a:r>
-                        <a:t>21</a:t>
+                        <a:t>1</a:t>
                       </a:r>
                     </a:p>
                   </a:txBody>
@@ -4228,7 +4229,7 @@
                     <a:bodyPr/>
                     <a:lstStyle/>
                     <a:p>
-                      <a:pPr algn="ctr">
+                      <a:pPr>
                         <a:defRPr sz="1200">
                           <a:solidFill>
                             <a:srgbClr val="1A1A1A"/>
@@ -4236,7 +4237,7 @@
                         </a:defRPr>
                       </a:pPr>
                       <a:r>
-                        <a:t>35%</a:t>
+                        <a:t>4%</a:t>
                       </a:r>
                     </a:p>
                   </a:txBody>
@@ -4249,7 +4250,7 @@
                     <a:bodyPr/>
                     <a:lstStyle/>
                     <a:p>
-                      <a:pPr algn="l">
+                      <a:pPr>
                         <a:defRPr sz="1200">
                           <a:solidFill>
                             <a:srgbClr val="1A1A1A"/>
@@ -4268,7 +4269,7 @@
                     <a:bodyPr/>
                     <a:lstStyle/>
                     <a:p>
-                      <a:pPr algn="ctr">
+                      <a:pPr>
                         <a:defRPr sz="1200">
                           <a:solidFill>
                             <a:srgbClr val="1A1A1A"/>
@@ -4287,7 +4288,7 @@
                     <a:bodyPr/>
                     <a:lstStyle/>
                     <a:p>
-                      <a:pPr algn="ctr">
+                      <a:pPr>
                         <a:defRPr sz="1200">
                           <a:solidFill>
                             <a:srgbClr val="1A1A1A"/>
@@ -4295,7 +4296,7 @@
                         </a:defRPr>
                       </a:pPr>
                       <a:r>
-                        <a:t>37%</a:t>
+                        <a:t>52%</a:t>
                       </a:r>
                     </a:p>
                   </a:txBody>
@@ -4430,7 +4431,7 @@
         <p:spPr>
           <a:xfrm>
             <a:off x="7132320" y="2971800"/>
-            <a:ext cx="2243023" cy="274320"/>
+            <a:ext cx="4465929" cy="274320"/>
           </a:xfrm>
           <a:prstGeom prst="rect">
             <a:avLst/>
@@ -4472,7 +4473,7 @@
         </p:nvSpPr>
         <p:spPr>
           <a:xfrm>
-            <a:off x="9466783" y="2926080"/>
+            <a:off x="11689689" y="2926080"/>
             <a:ext cx="1371600" cy="365760"/>
           </a:xfrm>
           <a:prstGeom prst="rect">
@@ -4495,7 +4496,7 @@
               </a:defRPr>
             </a:pPr>
             <a:r>
-              <a:t>44.6%</a:t>
+              <a:t>88.8%</a:t>
             </a:r>
           </a:p>
         </p:txBody>
@@ -4545,7 +4546,7 @@
         <p:spPr>
           <a:xfrm>
             <a:off x="7132320" y="3520440"/>
-            <a:ext cx="950518" cy="274320"/>
+            <a:ext cx="2313432" cy="274320"/>
           </a:xfrm>
           <a:prstGeom prst="rect">
             <a:avLst/>
@@ -4587,7 +4588,7 @@
         </p:nvSpPr>
         <p:spPr>
           <a:xfrm>
-            <a:off x="8174278" y="3474720"/>
+            <a:off x="9537192" y="3474720"/>
             <a:ext cx="1371600" cy="365760"/>
           </a:xfrm>
           <a:prstGeom prst="rect">
@@ -4610,7 +4611,7 @@
               </a:defRPr>
             </a:pPr>
             <a:r>
-              <a:t>18.9%</a:t>
+              <a:t>46.0%</a:t>
             </a:r>
           </a:p>
         </p:txBody>
@@ -4660,7 +4661,7 @@
         <p:spPr>
           <a:xfrm>
             <a:off x="7132320" y="4069080"/>
-            <a:ext cx="900226" cy="274320"/>
+            <a:ext cx="4797856" cy="274320"/>
           </a:xfrm>
           <a:prstGeom prst="rect">
             <a:avLst/>
@@ -4702,7 +4703,7 @@
         </p:nvSpPr>
         <p:spPr>
           <a:xfrm>
-            <a:off x="8123986" y="4023360"/>
+            <a:off x="12021616" y="4023360"/>
             <a:ext cx="1371600" cy="365760"/>
           </a:xfrm>
           <a:prstGeom prst="rect">
@@ -4725,7 +4726,7 @@
               </a:defRPr>
             </a:pPr>
             <a:r>
-              <a:t>17.9%</a:t>
+              <a:t>95.4%</a:t>
             </a:r>
           </a:p>
         </p:txBody>
@@ -4775,7 +4776,7 @@
         <p:spPr>
           <a:xfrm>
             <a:off x="7132320" y="4617720"/>
-            <a:ext cx="900226" cy="274320"/>
+            <a:ext cx="603504" cy="274320"/>
           </a:xfrm>
           <a:prstGeom prst="rect">
             <a:avLst/>
@@ -4817,7 +4818,7 @@
         </p:nvSpPr>
         <p:spPr>
           <a:xfrm>
-            <a:off x="8123986" y="4572000"/>
+            <a:off x="7827264" y="4572000"/>
             <a:ext cx="1371600" cy="365760"/>
           </a:xfrm>
           <a:prstGeom prst="rect">
@@ -4840,7 +4841,7 @@
               </a:defRPr>
             </a:pPr>
             <a:r>
-              <a:t>17.9%</a:t>
+              <a:t>12.0%</a:t>
             </a:r>
           </a:p>
         </p:txBody>
@@ -4848,157 +4849,6 @@
       <p:sp>
         <p:nvSpPr>
           <p:cNvPr id="34" name="TextBox 33"/>
-          <p:cNvSpPr txBox="1"/>
-          <p:nvPr/>
-        </p:nvSpPr>
-        <p:spPr>
-          <a:xfrm>
-            <a:off x="5943600" y="5120640"/>
-            <a:ext cx="1097280" cy="365760"/>
-          </a:xfrm>
-          <a:prstGeom prst="rect">
-            <a:avLst/>
-          </a:prstGeom>
-          <a:noFill/>
-        </p:spPr>
-        <p:txBody>
-          <a:bodyPr wrap="square">
-            <a:spAutoFit/>
-          </a:bodyPr>
-          <a:lstStyle/>
-          <a:p>
-            <a:pPr algn="l">
-              <a:defRPr sz="1300" b="0">
-                <a:solidFill>
-                  <a:srgbClr val="1A1A1A"/>
-                </a:solidFill>
-                <a:latin typeface="Calibri"/>
-              </a:defRPr>
-            </a:pPr>
-            <a:r>
-              <a:t>Other</a:t>
-            </a:r>
-          </a:p>
-        </p:txBody>
-      </p:sp>
-      <p:sp>
-        <p:nvSpPr>
-          <p:cNvPr id="35" name="Rectangle 34"/>
-          <p:cNvSpPr/>
-          <p:nvPr/>
-        </p:nvSpPr>
-        <p:spPr>
-          <a:xfrm>
-            <a:off x="7132320" y="5166360"/>
-            <a:ext cx="1609344" cy="274320"/>
-          </a:xfrm>
-          <a:prstGeom prst="rect">
-            <a:avLst/>
-          </a:prstGeom>
-          <a:solidFill>
-            <a:srgbClr val="808080"/>
-          </a:solidFill>
-          <a:ln>
-            <a:noFill/>
-          </a:ln>
-        </p:spPr>
-        <p:style>
-          <a:lnRef idx="1">
-            <a:schemeClr val="accent1"/>
-          </a:lnRef>
-          <a:fillRef idx="3">
-            <a:schemeClr val="accent1"/>
-          </a:fillRef>
-          <a:effectRef idx="2">
-            <a:schemeClr val="accent1"/>
-          </a:effectRef>
-          <a:fontRef idx="minor">
-            <a:schemeClr val="lt1"/>
-          </a:fontRef>
-        </p:style>
-        <p:txBody>
-          <a:bodyPr rtlCol="0" anchor="ctr"/>
-          <a:lstStyle/>
-          <a:p>
-            <a:pPr algn="ctr"/>
-          </a:p>
-        </p:txBody>
-      </p:sp>
-      <p:sp>
-        <p:nvSpPr>
-          <p:cNvPr id="36" name="TextBox 35"/>
-          <p:cNvSpPr txBox="1"/>
-          <p:nvPr/>
-        </p:nvSpPr>
-        <p:spPr>
-          <a:xfrm>
-            <a:off x="8833104" y="5120640"/>
-            <a:ext cx="1371600" cy="365760"/>
-          </a:xfrm>
-          <a:prstGeom prst="rect">
-            <a:avLst/>
-          </a:prstGeom>
-          <a:noFill/>
-        </p:spPr>
-        <p:txBody>
-          <a:bodyPr wrap="square">
-            <a:spAutoFit/>
-          </a:bodyPr>
-          <a:lstStyle/>
-          <a:p>
-            <a:pPr algn="l">
-              <a:defRPr sz="1200" b="0">
-                <a:solidFill>
-                  <a:srgbClr val="5C5C5C"/>
-                </a:solidFill>
-                <a:latin typeface="Calibri"/>
-              </a:defRPr>
-            </a:pPr>
-            <a:r>
-              <a:t>32.0%</a:t>
-            </a:r>
-          </a:p>
-        </p:txBody>
-      </p:sp>
-      <p:sp>
-        <p:nvSpPr>
-          <p:cNvPr id="37" name="TextBox 36"/>
-          <p:cNvSpPr txBox="1"/>
-          <p:nvPr/>
-        </p:nvSpPr>
-        <p:spPr>
-          <a:xfrm>
-            <a:off x="457200" y="4937760"/>
-            <a:ext cx="10972800" cy="1645920"/>
-          </a:xfrm>
-          <a:prstGeom prst="rect">
-            <a:avLst/>
-          </a:prstGeom>
-          <a:noFill/>
-        </p:spPr>
-        <p:txBody>
-          <a:bodyPr wrap="square">
-            <a:spAutoFit/>
-          </a:bodyPr>
-          <a:lstStyle/>
-          <a:p>
-            <a:pPr algn="l">
-              <a:defRPr sz="1100" b="0">
-                <a:solidFill>
-                  <a:srgbClr val="5C5C5C"/>
-                </a:solidFill>
-                <a:latin typeface="Calibri"/>
-              </a:defRPr>
-            </a:pPr>
-            <a:r>
-              <a:t>CLINICAL BIAS ASSESSMENT REPORT</a:t>
-            </a:r>
-          </a:p>
-        </p:txBody>
-      </p:sp>
-      <p:sp>
-        <p:nvSpPr>
-          <p:cNvPr id="38" name="TextBox 37"/>
           <p:cNvSpPr txBox="1"/>
           <p:nvPr/>
         </p:nvSpPr>
@@ -5027,7 +4877,7 @@
               </a:defRPr>
             </a:pPr>
             <a:r>
-              <a:t>10 / 14</a:t>
+              <a:t>10/15</a:t>
             </a:r>
           </a:p>
         </p:txBody>
@@ -5109,8 +4959,8 @@
         </p:nvSpPr>
         <p:spPr>
           <a:xfrm>
-            <a:off x="457200" y="274320"/>
-            <a:ext cx="10972800" cy="548640"/>
+            <a:off x="457200" y="182880"/>
+            <a:ext cx="10972800" cy="457200"/>
           </a:xfrm>
           <a:prstGeom prst="rect">
             <a:avLst/>
@@ -5124,7 +4974,7 @@
           <a:lstStyle/>
           <a:p>
             <a:pPr algn="l">
-              <a:defRPr sz="3600" b="1">
+              <a:defRPr sz="3200" b="1">
                 <a:solidFill>
                   <a:srgbClr val="9B1B30"/>
                 </a:solidFill>
@@ -5132,21 +4982,532 @@
               </a:defRPr>
             </a:pPr>
             <a:r>
-              <a:t>Key Findings Across All 5 Guidelines</a:t>
-            </a:r>
-          </a:p>
-        </p:txBody>
-      </p:sp>
-      <p:sp>
-        <p:nvSpPr>
-          <p:cNvPr id="4" name="Rectangle 3"/>
+              <a:t>Results: AASLD HCC 2023</a:t>
+            </a:r>
+          </a:p>
+        </p:txBody>
+      </p:sp>
+      <p:sp>
+        <p:nvSpPr>
+          <p:cNvPr id="4" name="TextBox 3"/>
+          <p:cNvSpPr txBox="1"/>
+          <p:nvPr/>
+        </p:nvSpPr>
+        <p:spPr>
+          <a:xfrm>
+            <a:off x="457200" y="640080"/>
+            <a:ext cx="10972800" cy="365760"/>
+          </a:xfrm>
+          <a:prstGeom prst="rect">
+            <a:avLst/>
+          </a:prstGeom>
+          <a:noFill/>
+        </p:spPr>
+        <p:txBody>
+          <a:bodyPr wrap="square">
+            <a:spAutoFit/>
+          </a:bodyPr>
+          <a:lstStyle/>
+          <a:p>
+            <a:pPr algn="l">
+              <a:defRPr sz="1400" b="0">
+                <a:solidFill>
+                  <a:srgbClr val="5C5C5C"/>
+                </a:solidFill>
+                <a:latin typeface="Calibri"/>
+              </a:defRPr>
+            </a:pPr>
+            <a:r>
+              <a:t>AASLD Practice Guidance on prevention, diagnosis, and treatment of hepatocellular carcinoma</a:t>
+            </a:r>
+          </a:p>
+        </p:txBody>
+      </p:sp>
+      <p:sp>
+        <p:nvSpPr>
+          <p:cNvPr id="5" name="Rectangle 4"/>
           <p:cNvSpPr/>
           <p:nvPr/>
         </p:nvSpPr>
         <p:spPr>
           <a:xfrm>
-            <a:off x="457200" y="868680"/>
-            <a:ext cx="2743200" cy="36576"/>
+            <a:off x="10058400" y="548640"/>
+            <a:ext cx="1828800" cy="457200"/>
+          </a:xfrm>
+          <a:prstGeom prst="rect">
+            <a:avLst/>
+          </a:prstGeom>
+          <a:solidFill>
+            <a:srgbClr val="991B1B"/>
+          </a:solidFill>
+          <a:ln>
+            <a:noFill/>
+          </a:ln>
+        </p:spPr>
+        <p:style>
+          <a:lnRef idx="1">
+            <a:schemeClr val="accent1"/>
+          </a:lnRef>
+          <a:fillRef idx="3">
+            <a:schemeClr val="accent1"/>
+          </a:fillRef>
+          <a:effectRef idx="2">
+            <a:schemeClr val="accent1"/>
+          </a:effectRef>
+          <a:fontRef idx="minor">
+            <a:schemeClr val="lt1"/>
+          </a:fontRef>
+        </p:style>
+        <p:txBody>
+          <a:bodyPr rtlCol="0" anchor="ctr"/>
+          <a:lstStyle/>
+          <a:p>
+            <a:pPr algn="ctr"/>
+          </a:p>
+        </p:txBody>
+      </p:sp>
+      <p:sp>
+        <p:nvSpPr>
+          <p:cNvPr id="6" name="TextBox 5"/>
+          <p:cNvSpPr txBox="1"/>
+          <p:nvPr/>
+        </p:nvSpPr>
+        <p:spPr>
+          <a:xfrm>
+            <a:off x="10058400" y="548640"/>
+            <a:ext cx="1828800" cy="457200"/>
+          </a:xfrm>
+          <a:prstGeom prst="rect">
+            <a:avLst/>
+          </a:prstGeom>
+          <a:noFill/>
+        </p:spPr>
+        <p:txBody>
+          <a:bodyPr wrap="square">
+            <a:spAutoFit/>
+          </a:bodyPr>
+          <a:lstStyle/>
+          <a:p>
+            <a:pPr algn="ctr">
+              <a:defRPr sz="1400" b="1">
+                <a:solidFill>
+                  <a:srgbClr val="FFFFFF"/>
+                </a:solidFill>
+                <a:latin typeface="Calibri"/>
+              </a:defRPr>
+            </a:pPr>
+            <a:r>
+              <a:t>NOT USABLE</a:t>
+            </a:r>
+          </a:p>
+        </p:txBody>
+      </p:sp>
+      <p:sp>
+        <p:nvSpPr>
+          <p:cNvPr id="7" name="TextBox 6"/>
+          <p:cNvSpPr txBox="1"/>
+          <p:nvPr/>
+        </p:nvSpPr>
+        <p:spPr>
+          <a:xfrm>
+            <a:off x="457200" y="1188720"/>
+            <a:ext cx="1828800" cy="365760"/>
+          </a:xfrm>
+          <a:prstGeom prst="rect">
+            <a:avLst/>
+          </a:prstGeom>
+          <a:noFill/>
+        </p:spPr>
+        <p:txBody>
+          <a:bodyPr wrap="square">
+            <a:spAutoFit/>
+          </a:bodyPr>
+          <a:lstStyle/>
+          <a:p>
+            <a:pPr algn="l">
+              <a:defRPr sz="1200" b="0">
+                <a:solidFill>
+                  <a:srgbClr val="5C5C5C"/>
+                </a:solidFill>
+                <a:latin typeface="Calibri"/>
+              </a:defRPr>
+            </a:pPr>
+            <a:r>
+              <a:t>Screened</a:t>
+            </a:r>
+          </a:p>
+        </p:txBody>
+      </p:sp>
+      <p:sp>
+        <p:nvSpPr>
+          <p:cNvPr id="8" name="TextBox 7"/>
+          <p:cNvSpPr txBox="1"/>
+          <p:nvPr/>
+        </p:nvSpPr>
+        <p:spPr>
+          <a:xfrm>
+            <a:off x="457200" y="1463040"/>
+            <a:ext cx="1828800" cy="548640"/>
+          </a:xfrm>
+          <a:prstGeom prst="rect">
+            <a:avLst/>
+          </a:prstGeom>
+          <a:noFill/>
+        </p:spPr>
+        <p:txBody>
+          <a:bodyPr wrap="square">
+            <a:spAutoFit/>
+          </a:bodyPr>
+          <a:lstStyle/>
+          <a:p>
+            <a:pPr algn="l">
+              <a:defRPr sz="2800" b="1">
+                <a:solidFill>
+                  <a:srgbClr val="1A1A1A"/>
+                </a:solidFill>
+                <a:latin typeface="Calibri"/>
+              </a:defRPr>
+            </a:pPr>
+            <a:r>
+              <a:t>318</a:t>
+            </a:r>
+          </a:p>
+        </p:txBody>
+      </p:sp>
+      <p:sp>
+        <p:nvSpPr>
+          <p:cNvPr id="9" name="TextBox 8"/>
+          <p:cNvSpPr txBox="1"/>
+          <p:nvPr/>
+        </p:nvSpPr>
+        <p:spPr>
+          <a:xfrm>
+            <a:off x="2377440" y="1188720"/>
+            <a:ext cx="1828800" cy="365760"/>
+          </a:xfrm>
+          <a:prstGeom prst="rect">
+            <a:avLst/>
+          </a:prstGeom>
+          <a:noFill/>
+        </p:spPr>
+        <p:txBody>
+          <a:bodyPr wrap="square">
+            <a:spAutoFit/>
+          </a:bodyPr>
+          <a:lstStyle/>
+          <a:p>
+            <a:pPr algn="l">
+              <a:defRPr sz="1200" b="0">
+                <a:solidFill>
+                  <a:srgbClr val="5C5C5C"/>
+                </a:solidFill>
+                <a:latin typeface="Calibri"/>
+              </a:defRPr>
+            </a:pPr>
+            <a:r>
+              <a:t>With Data</a:t>
+            </a:r>
+          </a:p>
+        </p:txBody>
+      </p:sp>
+      <p:sp>
+        <p:nvSpPr>
+          <p:cNvPr id="10" name="TextBox 9"/>
+          <p:cNvSpPr txBox="1"/>
+          <p:nvPr/>
+        </p:nvSpPr>
+        <p:spPr>
+          <a:xfrm>
+            <a:off x="2377440" y="1463040"/>
+            <a:ext cx="1828800" cy="548640"/>
+          </a:xfrm>
+          <a:prstGeom prst="rect">
+            <a:avLst/>
+          </a:prstGeom>
+          <a:noFill/>
+        </p:spPr>
+        <p:txBody>
+          <a:bodyPr wrap="square">
+            <a:spAutoFit/>
+          </a:bodyPr>
+          <a:lstStyle/>
+          <a:p>
+            <a:pPr algn="l">
+              <a:defRPr sz="2800" b="1">
+                <a:solidFill>
+                  <a:srgbClr val="1A1A1A"/>
+                </a:solidFill>
+                <a:latin typeface="Calibri"/>
+              </a:defRPr>
+            </a:pPr>
+            <a:r>
+              <a:t>100</a:t>
+            </a:r>
+          </a:p>
+        </p:txBody>
+      </p:sp>
+      <p:sp>
+        <p:nvSpPr>
+          <p:cNvPr id="11" name="TextBox 10"/>
+          <p:cNvSpPr txBox="1"/>
+          <p:nvPr/>
+        </p:nvSpPr>
+        <p:spPr>
+          <a:xfrm>
+            <a:off x="4297680" y="1188720"/>
+            <a:ext cx="1828800" cy="365760"/>
+          </a:xfrm>
+          <a:prstGeom prst="rect">
+            <a:avLst/>
+          </a:prstGeom>
+          <a:noFill/>
+        </p:spPr>
+        <p:txBody>
+          <a:bodyPr wrap="square">
+            <a:spAutoFit/>
+          </a:bodyPr>
+          <a:lstStyle/>
+          <a:p>
+            <a:pPr algn="l">
+              <a:defRPr sz="1200" b="0">
+                <a:solidFill>
+                  <a:srgbClr val="5C5C5C"/>
+                </a:solidFill>
+                <a:latin typeface="Calibri"/>
+              </a:defRPr>
+            </a:pPr>
+            <a:r>
+              <a:t>Eligible</a:t>
+            </a:r>
+          </a:p>
+        </p:txBody>
+      </p:sp>
+      <p:sp>
+        <p:nvSpPr>
+          <p:cNvPr id="12" name="TextBox 11"/>
+          <p:cNvSpPr txBox="1"/>
+          <p:nvPr/>
+        </p:nvSpPr>
+        <p:spPr>
+          <a:xfrm>
+            <a:off x="4297680" y="1463040"/>
+            <a:ext cx="1828800" cy="548640"/>
+          </a:xfrm>
+          <a:prstGeom prst="rect">
+            <a:avLst/>
+          </a:prstGeom>
+          <a:noFill/>
+        </p:spPr>
+        <p:txBody>
+          <a:bodyPr wrap="square">
+            <a:spAutoFit/>
+          </a:bodyPr>
+          <a:lstStyle/>
+          <a:p>
+            <a:pPr algn="l">
+              <a:defRPr sz="2800" b="1">
+                <a:solidFill>
+                  <a:srgbClr val="1A1A1A"/>
+                </a:solidFill>
+                <a:latin typeface="Calibri"/>
+              </a:defRPr>
+            </a:pPr>
+            <a:r>
+              <a:t>60</a:t>
+            </a:r>
+          </a:p>
+        </p:txBody>
+      </p:sp>
+      <p:sp>
+        <p:nvSpPr>
+          <p:cNvPr id="13" name="TextBox 12"/>
+          <p:cNvSpPr txBox="1"/>
+          <p:nvPr/>
+        </p:nvSpPr>
+        <p:spPr>
+          <a:xfrm>
+            <a:off x="6217920" y="1188720"/>
+            <a:ext cx="1828800" cy="365760"/>
+          </a:xfrm>
+          <a:prstGeom prst="rect">
+            <a:avLst/>
+          </a:prstGeom>
+          <a:noFill/>
+        </p:spPr>
+        <p:txBody>
+          <a:bodyPr wrap="square">
+            <a:spAutoFit/>
+          </a:bodyPr>
+          <a:lstStyle/>
+          <a:p>
+            <a:pPr algn="l">
+              <a:defRPr sz="1200" b="0">
+                <a:solidFill>
+                  <a:srgbClr val="5C5C5C"/>
+                </a:solidFill>
+                <a:latin typeface="Calibri"/>
+              </a:defRPr>
+            </a:pPr>
+            <a:r>
+              <a:t>Participants</a:t>
+            </a:r>
+          </a:p>
+        </p:txBody>
+      </p:sp>
+      <p:sp>
+        <p:nvSpPr>
+          <p:cNvPr id="14" name="TextBox 13"/>
+          <p:cNvSpPr txBox="1"/>
+          <p:nvPr/>
+        </p:nvSpPr>
+        <p:spPr>
+          <a:xfrm>
+            <a:off x="6217920" y="1463040"/>
+            <a:ext cx="1828800" cy="548640"/>
+          </a:xfrm>
+          <a:prstGeom prst="rect">
+            <a:avLst/>
+          </a:prstGeom>
+          <a:noFill/>
+        </p:spPr>
+        <p:txBody>
+          <a:bodyPr wrap="square">
+            <a:spAutoFit/>
+          </a:bodyPr>
+          <a:lstStyle/>
+          <a:p>
+            <a:pPr algn="l">
+              <a:defRPr sz="2800" b="1">
+                <a:solidFill>
+                  <a:srgbClr val="1A1A1A"/>
+                </a:solidFill>
+                <a:latin typeface="Calibri"/>
+              </a:defRPr>
+            </a:pPr>
+            <a:r>
+              <a:t>14,542,003</a:t>
+            </a:r>
+          </a:p>
+        </p:txBody>
+      </p:sp>
+      <p:sp>
+        <p:nvSpPr>
+          <p:cNvPr id="15" name="TextBox 14"/>
+          <p:cNvSpPr txBox="1"/>
+          <p:nvPr/>
+        </p:nvSpPr>
+        <p:spPr>
+          <a:xfrm>
+            <a:off x="8138160" y="1188720"/>
+            <a:ext cx="1828800" cy="365760"/>
+          </a:xfrm>
+          <a:prstGeom prst="rect">
+            <a:avLst/>
+          </a:prstGeom>
+          <a:noFill/>
+        </p:spPr>
+        <p:txBody>
+          <a:bodyPr wrap="square">
+            <a:spAutoFit/>
+          </a:bodyPr>
+          <a:lstStyle/>
+          <a:p>
+            <a:pPr algn="l">
+              <a:defRPr sz="1200" b="0">
+                <a:solidFill>
+                  <a:srgbClr val="5C5C5C"/>
+                </a:solidFill>
+                <a:latin typeface="Calibri"/>
+              </a:defRPr>
+            </a:pPr>
+            <a:r>
+              <a:t>Bias</a:t>
+            </a:r>
+          </a:p>
+        </p:txBody>
+      </p:sp>
+      <p:sp>
+        <p:nvSpPr>
+          <p:cNvPr id="16" name="TextBox 15"/>
+          <p:cNvSpPr txBox="1"/>
+          <p:nvPr/>
+        </p:nvSpPr>
+        <p:spPr>
+          <a:xfrm>
+            <a:off x="8138160" y="1463040"/>
+            <a:ext cx="1828800" cy="548640"/>
+          </a:xfrm>
+          <a:prstGeom prst="rect">
+            <a:avLst/>
+          </a:prstGeom>
+          <a:noFill/>
+        </p:spPr>
+        <p:txBody>
+          <a:bodyPr wrap="square">
+            <a:spAutoFit/>
+          </a:bodyPr>
+          <a:lstStyle/>
+          <a:p>
+            <a:pPr algn="l">
+              <a:defRPr sz="2800" b="1">
+                <a:solidFill>
+                  <a:srgbClr val="1A1A1A"/>
+                </a:solidFill>
+                <a:latin typeface="Calibri"/>
+              </a:defRPr>
+            </a:pPr>
+            <a:r>
+              <a:t>69%</a:t>
+            </a:r>
+          </a:p>
+        </p:txBody>
+      </p:sp>
+      <p:sp>
+        <p:nvSpPr>
+          <p:cNvPr id="17" name="TextBox 16"/>
+          <p:cNvSpPr txBox="1"/>
+          <p:nvPr/>
+        </p:nvSpPr>
+        <p:spPr>
+          <a:xfrm>
+            <a:off x="457200" y="2286000"/>
+            <a:ext cx="4572000" cy="365760"/>
+          </a:xfrm>
+          <a:prstGeom prst="rect">
+            <a:avLst/>
+          </a:prstGeom>
+          <a:noFill/>
+        </p:spPr>
+        <p:txBody>
+          <a:bodyPr wrap="square">
+            <a:spAutoFit/>
+          </a:bodyPr>
+          <a:lstStyle/>
+          <a:p>
+            <a:pPr algn="l">
+              <a:defRPr sz="1800" b="1">
+                <a:solidFill>
+                  <a:srgbClr val="9B1B30"/>
+                </a:solidFill>
+                <a:latin typeface="Calibri"/>
+              </a:defRPr>
+            </a:pPr>
+            <a:r>
+              <a:t>Demographic Reporting</a:t>
+            </a:r>
+          </a:p>
+        </p:txBody>
+      </p:sp>
+      <p:sp>
+        <p:nvSpPr>
+          <p:cNvPr id="18" name="Rectangle 17"/>
+          <p:cNvSpPr/>
+          <p:nvPr/>
+        </p:nvSpPr>
+        <p:spPr>
+          <a:xfrm>
+            <a:off x="457200" y="2697480"/>
+            <a:ext cx="4572000" cy="18288"/>
           </a:xfrm>
           <a:prstGeom prst="rect">
             <a:avLst/>
@@ -5180,33 +5541,384 @@
           </a:p>
         </p:txBody>
       </p:sp>
-      <p:sp>
-        <p:nvSpPr>
-          <p:cNvPr id="5" name="TextBox 4"/>
-          <p:cNvSpPr txBox="1"/>
-          <p:nvPr/>
-        </p:nvSpPr>
-        <p:spPr>
-          <a:xfrm>
-            <a:off x="640080" y="1188720"/>
-            <a:ext cx="10515600" cy="5029200"/>
-          </a:xfrm>
-          <a:prstGeom prst="rect">
-            <a:avLst/>
-          </a:prstGeom>
-          <a:noFill/>
-        </p:spPr>
-        <p:txBody>
-          <a:bodyPr wrap="square">
-            <a:spAutoFit/>
-          </a:bodyPr>
-          <a:lstStyle/>
-          <a:p>
-            <a:pPr>
-              <a:spcAft>
-                <a:spcPts val="600"/>
-              </a:spcAft>
-              <a:defRPr sz="1700">
+      <p:graphicFrame>
+        <p:nvGraphicFramePr>
+          <p:cNvPr id="19" name="Table 18"/>
+          <p:cNvGraphicFramePr>
+            <a:graphicFrameLocks noGrp="1"/>
+          </p:cNvGraphicFramePr>
+          <p:nvPr/>
+        </p:nvGraphicFramePr>
+        <p:xfrm>
+          <a:off x="457200" y="2834640"/>
+          <a:ext cx="5029200" cy="1828800"/>
+        </p:xfrm>
+        <a:graphic>
+          <a:graphicData uri="http://schemas.openxmlformats.org/drawingml/2006/table">
+            <a:tbl>
+              <a:tblPr firstRow="1" bandRow="1">
+                <a:tableStyleId>{5C22544A-7EE6-4342-B048-85BDC9FD1C3A}</a:tableStyleId>
+              </a:tblPr>
+              <a:tblGrid>
+                <a:gridCol w="2286000"/>
+                <a:gridCol w="1371600"/>
+                <a:gridCol w="1371600"/>
+              </a:tblGrid>
+              <a:tr h="457200">
+                <a:tc>
+                  <a:txBody>
+                    <a:bodyPr/>
+                    <a:lstStyle/>
+                    <a:p>
+                      <a:pPr>
+                        <a:defRPr sz="1200" b="1">
+                          <a:solidFill>
+                            <a:srgbClr val="FFFFFF"/>
+                          </a:solidFill>
+                        </a:defRPr>
+                      </a:pPr>
+                      <a:r>
+                        <a:t>Metric</a:t>
+                      </a:r>
+                    </a:p>
+                  </a:txBody>
+                  <a:tcPr>
+                    <a:solidFill>
+                      <a:srgbClr val="1A1A1A"/>
+                    </a:solidFill>
+                  </a:tcPr>
+                </a:tc>
+                <a:tc>
+                  <a:txBody>
+                    <a:bodyPr/>
+                    <a:lstStyle/>
+                    <a:p>
+                      <a:pPr>
+                        <a:defRPr sz="1200" b="1">
+                          <a:solidFill>
+                            <a:srgbClr val="FFFFFF"/>
+                          </a:solidFill>
+                        </a:defRPr>
+                      </a:pPr>
+                      <a:r>
+                        <a:t>n</a:t>
+                      </a:r>
+                    </a:p>
+                  </a:txBody>
+                  <a:tcPr>
+                    <a:solidFill>
+                      <a:srgbClr val="1A1A1A"/>
+                    </a:solidFill>
+                  </a:tcPr>
+                </a:tc>
+                <a:tc>
+                  <a:txBody>
+                    <a:bodyPr/>
+                    <a:lstStyle/>
+                    <a:p>
+                      <a:pPr>
+                        <a:defRPr sz="1200" b="1">
+                          <a:solidFill>
+                            <a:srgbClr val="FFFFFF"/>
+                          </a:solidFill>
+                        </a:defRPr>
+                      </a:pPr>
+                      <a:r>
+                        <a:t>%</a:t>
+                      </a:r>
+                    </a:p>
+                  </a:txBody>
+                  <a:tcPr>
+                    <a:solidFill>
+                      <a:srgbClr val="1A1A1A"/>
+                    </a:solidFill>
+                  </a:tcPr>
+                </a:tc>
+              </a:tr>
+              <a:tr h="457200">
+                <a:tc>
+                  <a:txBody>
+                    <a:bodyPr/>
+                    <a:lstStyle/>
+                    <a:p>
+                      <a:pPr>
+                        <a:defRPr sz="1200">
+                          <a:solidFill>
+                            <a:srgbClr val="1A1A1A"/>
+                          </a:solidFill>
+                        </a:defRPr>
+                      </a:pPr>
+                      <a:r>
+                        <a:t>Sex Reported (both)</a:t>
+                      </a:r>
+                    </a:p>
+                  </a:txBody>
+                  <a:tcPr/>
+                </a:tc>
+                <a:tc>
+                  <a:txBody>
+                    <a:bodyPr/>
+                    <a:lstStyle/>
+                    <a:p>
+                      <a:pPr>
+                        <a:defRPr sz="1200">
+                          <a:solidFill>
+                            <a:srgbClr val="1A1A1A"/>
+                          </a:solidFill>
+                        </a:defRPr>
+                      </a:pPr>
+                      <a:r>
+                        <a:t>n/a</a:t>
+                      </a:r>
+                    </a:p>
+                  </a:txBody>
+                  <a:tcPr/>
+                </a:tc>
+                <a:tc>
+                  <a:txBody>
+                    <a:bodyPr/>
+                    <a:lstStyle/>
+                    <a:p>
+                      <a:pPr>
+                        <a:defRPr sz="1200">
+                          <a:solidFill>
+                            <a:srgbClr val="1A1A1A"/>
+                          </a:solidFill>
+                        </a:defRPr>
+                      </a:pPr>
+                      <a:r>
+                        <a:t>10%</a:t>
+                      </a:r>
+                    </a:p>
+                  </a:txBody>
+                  <a:tcPr/>
+                </a:tc>
+              </a:tr>
+              <a:tr h="457200">
+                <a:tc>
+                  <a:txBody>
+                    <a:bodyPr/>
+                    <a:lstStyle/>
+                    <a:p>
+                      <a:pPr>
+                        <a:defRPr sz="1200">
+                          <a:solidFill>
+                            <a:srgbClr val="1A1A1A"/>
+                          </a:solidFill>
+                        </a:defRPr>
+                      </a:pPr>
+                      <a:r>
+                        <a:t>Any Race Reported</a:t>
+                      </a:r>
+                    </a:p>
+                  </a:txBody>
+                  <a:tcPr/>
+                </a:tc>
+                <a:tc>
+                  <a:txBody>
+                    <a:bodyPr/>
+                    <a:lstStyle/>
+                    <a:p>
+                      <a:pPr>
+                        <a:defRPr sz="1200">
+                          <a:solidFill>
+                            <a:srgbClr val="1A1A1A"/>
+                          </a:solidFill>
+                        </a:defRPr>
+                      </a:pPr>
+                      <a:r>
+                        <a:t>21</a:t>
+                      </a:r>
+                    </a:p>
+                  </a:txBody>
+                  <a:tcPr/>
+                </a:tc>
+                <a:tc>
+                  <a:txBody>
+                    <a:bodyPr/>
+                    <a:lstStyle/>
+                    <a:p>
+                      <a:pPr>
+                        <a:defRPr sz="1200">
+                          <a:solidFill>
+                            <a:srgbClr val="1A1A1A"/>
+                          </a:solidFill>
+                        </a:defRPr>
+                      </a:pPr>
+                      <a:r>
+                        <a:t>35%</a:t>
+                      </a:r>
+                    </a:p>
+                  </a:txBody>
+                  <a:tcPr/>
+                </a:tc>
+              </a:tr>
+              <a:tr h="457200">
+                <a:tc>
+                  <a:txBody>
+                    <a:bodyPr/>
+                    <a:lstStyle/>
+                    <a:p>
+                      <a:pPr>
+                        <a:defRPr sz="1200">
+                          <a:solidFill>
+                            <a:srgbClr val="1A1A1A"/>
+                          </a:solidFill>
+                        </a:defRPr>
+                      </a:pPr>
+                      <a:r>
+                        <a:t>USA Studies</a:t>
+                      </a:r>
+                    </a:p>
+                  </a:txBody>
+                  <a:tcPr/>
+                </a:tc>
+                <a:tc>
+                  <a:txBody>
+                    <a:bodyPr/>
+                    <a:lstStyle/>
+                    <a:p>
+                      <a:pPr>
+                        <a:defRPr sz="1200">
+                          <a:solidFill>
+                            <a:srgbClr val="1A1A1A"/>
+                          </a:solidFill>
+                        </a:defRPr>
+                      </a:pPr>
+                      <a:r>
+                        <a:t>n/a</a:t>
+                      </a:r>
+                    </a:p>
+                  </a:txBody>
+                  <a:tcPr/>
+                </a:tc>
+                <a:tc>
+                  <a:txBody>
+                    <a:bodyPr/>
+                    <a:lstStyle/>
+                    <a:p>
+                      <a:pPr>
+                        <a:defRPr sz="1200">
+                          <a:solidFill>
+                            <a:srgbClr val="1A1A1A"/>
+                          </a:solidFill>
+                        </a:defRPr>
+                      </a:pPr>
+                      <a:r>
+                        <a:t>37%</a:t>
+                      </a:r>
+                    </a:p>
+                  </a:txBody>
+                  <a:tcPr/>
+                </a:tc>
+              </a:tr>
+            </a:tbl>
+          </a:graphicData>
+        </a:graphic>
+      </p:graphicFrame>
+      <p:sp>
+        <p:nvSpPr>
+          <p:cNvPr id="20" name="TextBox 19"/>
+          <p:cNvSpPr txBox="1"/>
+          <p:nvPr/>
+        </p:nvSpPr>
+        <p:spPr>
+          <a:xfrm>
+            <a:off x="5943600" y="2286000"/>
+            <a:ext cx="5486400" cy="365760"/>
+          </a:xfrm>
+          <a:prstGeom prst="rect">
+            <a:avLst/>
+          </a:prstGeom>
+          <a:noFill/>
+        </p:spPr>
+        <p:txBody>
+          <a:bodyPr wrap="square">
+            <a:spAutoFit/>
+          </a:bodyPr>
+          <a:lstStyle/>
+          <a:p>
+            <a:pPr algn="l">
+              <a:defRPr sz="1800" b="1">
+                <a:solidFill>
+                  <a:srgbClr val="9B1B30"/>
+                </a:solidFill>
+                <a:latin typeface="Calibri"/>
+              </a:defRPr>
+            </a:pPr>
+            <a:r>
+              <a:t>Race Distribution (Mean %)</a:t>
+            </a:r>
+          </a:p>
+        </p:txBody>
+      </p:sp>
+      <p:sp>
+        <p:nvSpPr>
+          <p:cNvPr id="21" name="Rectangle 20"/>
+          <p:cNvSpPr/>
+          <p:nvPr/>
+        </p:nvSpPr>
+        <p:spPr>
+          <a:xfrm>
+            <a:off x="5943600" y="2697480"/>
+            <a:ext cx="4572000" cy="18288"/>
+          </a:xfrm>
+          <a:prstGeom prst="rect">
+            <a:avLst/>
+          </a:prstGeom>
+          <a:solidFill>
+            <a:srgbClr val="9B1B30"/>
+          </a:solidFill>
+          <a:ln>
+            <a:noFill/>
+          </a:ln>
+        </p:spPr>
+        <p:style>
+          <a:lnRef idx="1">
+            <a:schemeClr val="accent1"/>
+          </a:lnRef>
+          <a:fillRef idx="3">
+            <a:schemeClr val="accent1"/>
+          </a:fillRef>
+          <a:effectRef idx="2">
+            <a:schemeClr val="accent1"/>
+          </a:effectRef>
+          <a:fontRef idx="minor">
+            <a:schemeClr val="lt1"/>
+          </a:fontRef>
+        </p:style>
+        <p:txBody>
+          <a:bodyPr rtlCol="0" anchor="ctr"/>
+          <a:lstStyle/>
+          <a:p>
+            <a:pPr algn="ctr"/>
+          </a:p>
+        </p:txBody>
+      </p:sp>
+      <p:sp>
+        <p:nvSpPr>
+          <p:cNvPr id="22" name="TextBox 21"/>
+          <p:cNvSpPr txBox="1"/>
+          <p:nvPr/>
+        </p:nvSpPr>
+        <p:spPr>
+          <a:xfrm>
+            <a:off x="5943600" y="2926080"/>
+            <a:ext cx="1097280" cy="365760"/>
+          </a:xfrm>
+          <a:prstGeom prst="rect">
+            <a:avLst/>
+          </a:prstGeom>
+          <a:noFill/>
+        </p:spPr>
+        <p:txBody>
+          <a:bodyPr wrap="square">
+            <a:spAutoFit/>
+          </a:bodyPr>
+          <a:lstStyle/>
+          <a:p>
+            <a:pPr algn="l">
+              <a:defRPr sz="1300" b="0">
                 <a:solidFill>
                   <a:srgbClr val="1A1A1A"/>
                 </a:solidFill>
@@ -5214,15 +5926,114 @@
               </a:defRPr>
             </a:pPr>
             <a:r>
-              <a:t>Average bias score: 62.1% — most guidelines have inadequate demographic reporting</a:t>
-            </a:r>
-          </a:p>
-          <a:p>
-            <a:pPr>
-              <a:spcAft>
-                <a:spcPts val="600"/>
-              </a:spcAft>
-              <a:defRPr sz="1700">
+              <a:t>White</a:t>
+            </a:r>
+          </a:p>
+        </p:txBody>
+      </p:sp>
+      <p:sp>
+        <p:nvSpPr>
+          <p:cNvPr id="23" name="Rectangle 22"/>
+          <p:cNvSpPr/>
+          <p:nvPr/>
+        </p:nvSpPr>
+        <p:spPr>
+          <a:xfrm>
+            <a:off x="7132320" y="2971800"/>
+            <a:ext cx="2243023" cy="274320"/>
+          </a:xfrm>
+          <a:prstGeom prst="rect">
+            <a:avLst/>
+          </a:prstGeom>
+          <a:solidFill>
+            <a:srgbClr val="9B1B30"/>
+          </a:solidFill>
+          <a:ln>
+            <a:noFill/>
+          </a:ln>
+        </p:spPr>
+        <p:style>
+          <a:lnRef idx="1">
+            <a:schemeClr val="accent1"/>
+          </a:lnRef>
+          <a:fillRef idx="3">
+            <a:schemeClr val="accent1"/>
+          </a:fillRef>
+          <a:effectRef idx="2">
+            <a:schemeClr val="accent1"/>
+          </a:effectRef>
+          <a:fontRef idx="minor">
+            <a:schemeClr val="lt1"/>
+          </a:fontRef>
+        </p:style>
+        <p:txBody>
+          <a:bodyPr rtlCol="0" anchor="ctr"/>
+          <a:lstStyle/>
+          <a:p>
+            <a:pPr algn="ctr"/>
+          </a:p>
+        </p:txBody>
+      </p:sp>
+      <p:sp>
+        <p:nvSpPr>
+          <p:cNvPr id="24" name="TextBox 23"/>
+          <p:cNvSpPr txBox="1"/>
+          <p:nvPr/>
+        </p:nvSpPr>
+        <p:spPr>
+          <a:xfrm>
+            <a:off x="9466783" y="2926080"/>
+            <a:ext cx="1371600" cy="365760"/>
+          </a:xfrm>
+          <a:prstGeom prst="rect">
+            <a:avLst/>
+          </a:prstGeom>
+          <a:noFill/>
+        </p:spPr>
+        <p:txBody>
+          <a:bodyPr wrap="square">
+            <a:spAutoFit/>
+          </a:bodyPr>
+          <a:lstStyle/>
+          <a:p>
+            <a:pPr algn="l">
+              <a:defRPr sz="1200" b="0">
+                <a:solidFill>
+                  <a:srgbClr val="5C5C5C"/>
+                </a:solidFill>
+                <a:latin typeface="Calibri"/>
+              </a:defRPr>
+            </a:pPr>
+            <a:r>
+              <a:t>44.6%</a:t>
+            </a:r>
+          </a:p>
+        </p:txBody>
+      </p:sp>
+      <p:sp>
+        <p:nvSpPr>
+          <p:cNvPr id="25" name="TextBox 24"/>
+          <p:cNvSpPr txBox="1"/>
+          <p:nvPr/>
+        </p:nvSpPr>
+        <p:spPr>
+          <a:xfrm>
+            <a:off x="5943600" y="3474720"/>
+            <a:ext cx="1097280" cy="365760"/>
+          </a:xfrm>
+          <a:prstGeom prst="rect">
+            <a:avLst/>
+          </a:prstGeom>
+          <a:noFill/>
+        </p:spPr>
+        <p:txBody>
+          <a:bodyPr wrap="square">
+            <a:spAutoFit/>
+          </a:bodyPr>
+          <a:lstStyle/>
+          <a:p>
+            <a:pPr algn="l">
+              <a:defRPr sz="1300" b="0">
                 <a:solidFill>
                   <a:srgbClr val="1A1A1A"/>
                 </a:solidFill>
@@ -5230,15 +6041,114 @@
               </a:defRPr>
             </a:pPr>
             <a:r>
-              <a:t>Only 32.5% of eligible studies report any race/ethnicity data on average</a:t>
-            </a:r>
-          </a:p>
-          <a:p>
-            <a:pPr>
-              <a:spcAft>
-                <a:spcPts val="600"/>
-              </a:spcAft>
-              <a:defRPr sz="1700">
+              <a:t>Black</a:t>
+            </a:r>
+          </a:p>
+        </p:txBody>
+      </p:sp>
+      <p:sp>
+        <p:nvSpPr>
+          <p:cNvPr id="26" name="Rectangle 25"/>
+          <p:cNvSpPr/>
+          <p:nvPr/>
+        </p:nvSpPr>
+        <p:spPr>
+          <a:xfrm>
+            <a:off x="7132320" y="3520440"/>
+            <a:ext cx="950518" cy="274320"/>
+          </a:xfrm>
+          <a:prstGeom prst="rect">
+            <a:avLst/>
+          </a:prstGeom>
+          <a:solidFill>
+            <a:srgbClr val="DC143C"/>
+          </a:solidFill>
+          <a:ln>
+            <a:noFill/>
+          </a:ln>
+        </p:spPr>
+        <p:style>
+          <a:lnRef idx="1">
+            <a:schemeClr val="accent1"/>
+          </a:lnRef>
+          <a:fillRef idx="3">
+            <a:schemeClr val="accent1"/>
+          </a:fillRef>
+          <a:effectRef idx="2">
+            <a:schemeClr val="accent1"/>
+          </a:effectRef>
+          <a:fontRef idx="minor">
+            <a:schemeClr val="lt1"/>
+          </a:fontRef>
+        </p:style>
+        <p:txBody>
+          <a:bodyPr rtlCol="0" anchor="ctr"/>
+          <a:lstStyle/>
+          <a:p>
+            <a:pPr algn="ctr"/>
+          </a:p>
+        </p:txBody>
+      </p:sp>
+      <p:sp>
+        <p:nvSpPr>
+          <p:cNvPr id="27" name="TextBox 26"/>
+          <p:cNvSpPr txBox="1"/>
+          <p:nvPr/>
+        </p:nvSpPr>
+        <p:spPr>
+          <a:xfrm>
+            <a:off x="8174278" y="3474720"/>
+            <a:ext cx="1371600" cy="365760"/>
+          </a:xfrm>
+          <a:prstGeom prst="rect">
+            <a:avLst/>
+          </a:prstGeom>
+          <a:noFill/>
+        </p:spPr>
+        <p:txBody>
+          <a:bodyPr wrap="square">
+            <a:spAutoFit/>
+          </a:bodyPr>
+          <a:lstStyle/>
+          <a:p>
+            <a:pPr algn="l">
+              <a:defRPr sz="1200" b="0">
+                <a:solidFill>
+                  <a:srgbClr val="5C5C5C"/>
+                </a:solidFill>
+                <a:latin typeface="Calibri"/>
+              </a:defRPr>
+            </a:pPr>
+            <a:r>
+              <a:t>18.9%</a:t>
+            </a:r>
+          </a:p>
+        </p:txBody>
+      </p:sp>
+      <p:sp>
+        <p:nvSpPr>
+          <p:cNvPr id="28" name="TextBox 27"/>
+          <p:cNvSpPr txBox="1"/>
+          <p:nvPr/>
+        </p:nvSpPr>
+        <p:spPr>
+          <a:xfrm>
+            <a:off x="5943600" y="4023360"/>
+            <a:ext cx="1097280" cy="365760"/>
+          </a:xfrm>
+          <a:prstGeom prst="rect">
+            <a:avLst/>
+          </a:prstGeom>
+          <a:noFill/>
+        </p:spPr>
+        <p:txBody>
+          <a:bodyPr wrap="square">
+            <a:spAutoFit/>
+          </a:bodyPr>
+          <a:lstStyle/>
+          <a:p>
+            <a:pPr algn="l">
+              <a:defRPr sz="1300" b="0">
                 <a:solidFill>
                   <a:srgbClr val="1A1A1A"/>
                 </a:solidFill>
@@ -5246,15 +6156,114 @@
               </a:defRPr>
             </a:pPr>
             <a:r>
-              <a:t>ATA Thyroid 2015: 0% race reporting — publisher restricts PMC full-text access</a:t>
-            </a:r>
-          </a:p>
-          <a:p>
-            <a:pPr>
-              <a:spcAft>
-                <a:spcPts val="600"/>
-              </a:spcAft>
-              <a:defRPr sz="1700">
+              <a:t>Hispanic</a:t>
+            </a:r>
+          </a:p>
+        </p:txBody>
+      </p:sp>
+      <p:sp>
+        <p:nvSpPr>
+          <p:cNvPr id="29" name="Rectangle 28"/>
+          <p:cNvSpPr/>
+          <p:nvPr/>
+        </p:nvSpPr>
+        <p:spPr>
+          <a:xfrm>
+            <a:off x="7132320" y="4069080"/>
+            <a:ext cx="900226" cy="274320"/>
+          </a:xfrm>
+          <a:prstGeom prst="rect">
+            <a:avLst/>
+          </a:prstGeom>
+          <a:solidFill>
+            <a:srgbClr val="1A1A1A"/>
+          </a:solidFill>
+          <a:ln>
+            <a:noFill/>
+          </a:ln>
+        </p:spPr>
+        <p:style>
+          <a:lnRef idx="1">
+            <a:schemeClr val="accent1"/>
+          </a:lnRef>
+          <a:fillRef idx="3">
+            <a:schemeClr val="accent1"/>
+          </a:fillRef>
+          <a:effectRef idx="2">
+            <a:schemeClr val="accent1"/>
+          </a:effectRef>
+          <a:fontRef idx="minor">
+            <a:schemeClr val="lt1"/>
+          </a:fontRef>
+        </p:style>
+        <p:txBody>
+          <a:bodyPr rtlCol="0" anchor="ctr"/>
+          <a:lstStyle/>
+          <a:p>
+            <a:pPr algn="ctr"/>
+          </a:p>
+        </p:txBody>
+      </p:sp>
+      <p:sp>
+        <p:nvSpPr>
+          <p:cNvPr id="30" name="TextBox 29"/>
+          <p:cNvSpPr txBox="1"/>
+          <p:nvPr/>
+        </p:nvSpPr>
+        <p:spPr>
+          <a:xfrm>
+            <a:off x="8123986" y="4023360"/>
+            <a:ext cx="1371600" cy="365760"/>
+          </a:xfrm>
+          <a:prstGeom prst="rect">
+            <a:avLst/>
+          </a:prstGeom>
+          <a:noFill/>
+        </p:spPr>
+        <p:txBody>
+          <a:bodyPr wrap="square">
+            <a:spAutoFit/>
+          </a:bodyPr>
+          <a:lstStyle/>
+          <a:p>
+            <a:pPr algn="l">
+              <a:defRPr sz="1200" b="0">
+                <a:solidFill>
+                  <a:srgbClr val="5C5C5C"/>
+                </a:solidFill>
+                <a:latin typeface="Calibri"/>
+              </a:defRPr>
+            </a:pPr>
+            <a:r>
+              <a:t>17.9%</a:t>
+            </a:r>
+          </a:p>
+        </p:txBody>
+      </p:sp>
+      <p:sp>
+        <p:nvSpPr>
+          <p:cNvPr id="31" name="TextBox 30"/>
+          <p:cNvSpPr txBox="1"/>
+          <p:nvPr/>
+        </p:nvSpPr>
+        <p:spPr>
+          <a:xfrm>
+            <a:off x="5943600" y="4572000"/>
+            <a:ext cx="1097280" cy="365760"/>
+          </a:xfrm>
+          <a:prstGeom prst="rect">
+            <a:avLst/>
+          </a:prstGeom>
+          <a:noFill/>
+        </p:spPr>
+        <p:txBody>
+          <a:bodyPr wrap="square">
+            <a:spAutoFit/>
+          </a:bodyPr>
+          <a:lstStyle/>
+          <a:p>
+            <a:pPr algn="l">
+              <a:defRPr sz="1300" b="0">
                 <a:solidFill>
                   <a:srgbClr val="1A1A1A"/>
                 </a:solidFill>
@@ -5262,15 +6271,114 @@
               </a:defRPr>
             </a:pPr>
             <a:r>
-              <a:t>ADA Diabetes 2025: best race reporting among auto-extracted (45.7%)</a:t>
-            </a:r>
-          </a:p>
-          <a:p>
-            <a:pPr>
-              <a:spcAft>
-                <a:spcPts val="600"/>
-              </a:spcAft>
-              <a:defRPr sz="1700">
+              <a:t>Asian</a:t>
+            </a:r>
+          </a:p>
+        </p:txBody>
+      </p:sp>
+      <p:sp>
+        <p:nvSpPr>
+          <p:cNvPr id="32" name="Rectangle 31"/>
+          <p:cNvSpPr/>
+          <p:nvPr/>
+        </p:nvSpPr>
+        <p:spPr>
+          <a:xfrm>
+            <a:off x="7132320" y="4617720"/>
+            <a:ext cx="900226" cy="274320"/>
+          </a:xfrm>
+          <a:prstGeom prst="rect">
+            <a:avLst/>
+          </a:prstGeom>
+          <a:solidFill>
+            <a:srgbClr val="404040"/>
+          </a:solidFill>
+          <a:ln>
+            <a:noFill/>
+          </a:ln>
+        </p:spPr>
+        <p:style>
+          <a:lnRef idx="1">
+            <a:schemeClr val="accent1"/>
+          </a:lnRef>
+          <a:fillRef idx="3">
+            <a:schemeClr val="accent1"/>
+          </a:fillRef>
+          <a:effectRef idx="2">
+            <a:schemeClr val="accent1"/>
+          </a:effectRef>
+          <a:fontRef idx="minor">
+            <a:schemeClr val="lt1"/>
+          </a:fontRef>
+        </p:style>
+        <p:txBody>
+          <a:bodyPr rtlCol="0" anchor="ctr"/>
+          <a:lstStyle/>
+          <a:p>
+            <a:pPr algn="ctr"/>
+          </a:p>
+        </p:txBody>
+      </p:sp>
+      <p:sp>
+        <p:nvSpPr>
+          <p:cNvPr id="33" name="TextBox 32"/>
+          <p:cNvSpPr txBox="1"/>
+          <p:nvPr/>
+        </p:nvSpPr>
+        <p:spPr>
+          <a:xfrm>
+            <a:off x="8123986" y="4572000"/>
+            <a:ext cx="1371600" cy="365760"/>
+          </a:xfrm>
+          <a:prstGeom prst="rect">
+            <a:avLst/>
+          </a:prstGeom>
+          <a:noFill/>
+        </p:spPr>
+        <p:txBody>
+          <a:bodyPr wrap="square">
+            <a:spAutoFit/>
+          </a:bodyPr>
+          <a:lstStyle/>
+          <a:p>
+            <a:pPr algn="l">
+              <a:defRPr sz="1200" b="0">
+                <a:solidFill>
+                  <a:srgbClr val="5C5C5C"/>
+                </a:solidFill>
+                <a:latin typeface="Calibri"/>
+              </a:defRPr>
+            </a:pPr>
+            <a:r>
+              <a:t>17.9%</a:t>
+            </a:r>
+          </a:p>
+        </p:txBody>
+      </p:sp>
+      <p:sp>
+        <p:nvSpPr>
+          <p:cNvPr id="34" name="TextBox 33"/>
+          <p:cNvSpPr txBox="1"/>
+          <p:nvPr/>
+        </p:nvSpPr>
+        <p:spPr>
+          <a:xfrm>
+            <a:off x="5943600" y="5120640"/>
+            <a:ext cx="1097280" cy="365760"/>
+          </a:xfrm>
+          <a:prstGeom prst="rect">
+            <a:avLst/>
+          </a:prstGeom>
+          <a:noFill/>
+        </p:spPr>
+        <p:txBody>
+          <a:bodyPr wrap="square">
+            <a:spAutoFit/>
+          </a:bodyPr>
+          <a:lstStyle/>
+          <a:p>
+            <a:pPr algn="l">
+              <a:defRPr sz="1300" b="0">
                 <a:solidFill>
                   <a:srgbClr val="1A1A1A"/>
                 </a:solidFill>
@@ -5278,62 +6386,93 @@
               </a:defRPr>
             </a:pPr>
             <a:r>
-              <a:t>AACE Obesity 2016: 100% race reporting (manually curated — gold standard comparison)</a:t>
-            </a:r>
-          </a:p>
-          <a:p>
-            <a:pPr>
-              <a:spcAft>
-                <a:spcPts val="600"/>
-              </a:spcAft>
-              <a:defRPr sz="1700">
-                <a:solidFill>
-                  <a:srgbClr val="1A1A1A"/>
-                </a:solidFill>
-                <a:latin typeface="Calibri"/>
-              </a:defRPr>
-            </a:pPr>
-            <a:r>
-              <a:t>Total participants across all guidelines: 60M+ — massive evidence base with minimal demographic data</a:t>
-            </a:r>
-          </a:p>
-          <a:p>
-            <a:pPr>
-              <a:spcAft>
-                <a:spcPts val="600"/>
-              </a:spcAft>
-              <a:defRPr sz="1700">
-                <a:solidFill>
-                  <a:srgbClr val="1A1A1A"/>
-                </a:solidFill>
-                <a:latin typeface="Calibri"/>
-              </a:defRPr>
-            </a:pPr>
-            <a:r>
-              <a:t>Sex reporting (both M+F): higher than race but still incomplete in most guidelines</a:t>
-            </a:r>
-          </a:p>
-          <a:p>
-            <a:pPr>
-              <a:spcAft>
-                <a:spcPts val="600"/>
-              </a:spcAft>
-              <a:defRPr sz="1700">
-                <a:solidFill>
-                  <a:srgbClr val="1A1A1A"/>
-                </a:solidFill>
-                <a:latin typeface="Calibri"/>
-              </a:defRPr>
-            </a:pPr>
-            <a:r>
-              <a:t>Geographic bias: USA-centric across all guidelines (avg ~50-60% USA studies)</a:t>
-            </a:r>
-          </a:p>
-        </p:txBody>
-      </p:sp>
-      <p:sp>
-        <p:nvSpPr>
-          <p:cNvPr id="6" name="TextBox 5"/>
+              <a:t>Other</a:t>
+            </a:r>
+          </a:p>
+        </p:txBody>
+      </p:sp>
+      <p:sp>
+        <p:nvSpPr>
+          <p:cNvPr id="35" name="Rectangle 34"/>
+          <p:cNvSpPr/>
+          <p:nvPr/>
+        </p:nvSpPr>
+        <p:spPr>
+          <a:xfrm>
+            <a:off x="7132320" y="5166360"/>
+            <a:ext cx="1609344" cy="274320"/>
+          </a:xfrm>
+          <a:prstGeom prst="rect">
+            <a:avLst/>
+          </a:prstGeom>
+          <a:solidFill>
+            <a:srgbClr val="808080"/>
+          </a:solidFill>
+          <a:ln>
+            <a:noFill/>
+          </a:ln>
+        </p:spPr>
+        <p:style>
+          <a:lnRef idx="1">
+            <a:schemeClr val="accent1"/>
+          </a:lnRef>
+          <a:fillRef idx="3">
+            <a:schemeClr val="accent1"/>
+          </a:fillRef>
+          <a:effectRef idx="2">
+            <a:schemeClr val="accent1"/>
+          </a:effectRef>
+          <a:fontRef idx="minor">
+            <a:schemeClr val="lt1"/>
+          </a:fontRef>
+        </p:style>
+        <p:txBody>
+          <a:bodyPr rtlCol="0" anchor="ctr"/>
+          <a:lstStyle/>
+          <a:p>
+            <a:pPr algn="ctr"/>
+          </a:p>
+        </p:txBody>
+      </p:sp>
+      <p:sp>
+        <p:nvSpPr>
+          <p:cNvPr id="36" name="TextBox 35"/>
+          <p:cNvSpPr txBox="1"/>
+          <p:nvPr/>
+        </p:nvSpPr>
+        <p:spPr>
+          <a:xfrm>
+            <a:off x="8833104" y="5120640"/>
+            <a:ext cx="1371600" cy="365760"/>
+          </a:xfrm>
+          <a:prstGeom prst="rect">
+            <a:avLst/>
+          </a:prstGeom>
+          <a:noFill/>
+        </p:spPr>
+        <p:txBody>
+          <a:bodyPr wrap="square">
+            <a:spAutoFit/>
+          </a:bodyPr>
+          <a:lstStyle/>
+          <a:p>
+            <a:pPr algn="l">
+              <a:defRPr sz="1200" b="0">
+                <a:solidFill>
+                  <a:srgbClr val="5C5C5C"/>
+                </a:solidFill>
+                <a:latin typeface="Calibri"/>
+              </a:defRPr>
+            </a:pPr>
+            <a:r>
+              <a:t>32.0%</a:t>
+            </a:r>
+          </a:p>
+        </p:txBody>
+      </p:sp>
+      <p:sp>
+        <p:nvSpPr>
+          <p:cNvPr id="37" name="TextBox 36"/>
           <p:cNvSpPr txBox="1"/>
           <p:nvPr/>
         </p:nvSpPr>
@@ -5362,7 +6501,7 @@
               </a:defRPr>
             </a:pPr>
             <a:r>
-              <a:t>11 / 14</a:t>
+              <a:t>11/15</a:t>
             </a:r>
           </a:p>
         </p:txBody>
@@ -5467,7 +6606,7 @@
               </a:defRPr>
             </a:pPr>
             <a:r>
-              <a:t>Comparison: Manual vs Automated</a:t>
+              <a:t>Key Findings</a:t>
             </a:r>
           </a:p>
         </p:txBody>
@@ -5517,20 +6656,155 @@
       </p:sp>
       <p:sp>
         <p:nvSpPr>
-          <p:cNvPr id="5" name="Rectangle 4"/>
+          <p:cNvPr id="5" name="TextBox 4"/>
+          <p:cNvSpPr txBox="1"/>
+          <p:nvPr/>
+        </p:nvSpPr>
+        <p:spPr>
+          <a:xfrm>
+            <a:off x="640080" y="1188720"/>
+            <a:ext cx="10515600" cy="5029200"/>
+          </a:xfrm>
+          <a:prstGeom prst="rect">
+            <a:avLst/>
+          </a:prstGeom>
+          <a:noFill/>
+        </p:spPr>
+        <p:txBody>
+          <a:bodyPr wrap="square">
+            <a:spAutoFit/>
+          </a:bodyPr>
+          <a:lstStyle/>
+          <a:p>
+            <a:pPr>
+              <a:spcAft>
+                <a:spcPts val="600"/>
+              </a:spcAft>
+              <a:defRPr sz="1700">
+                <a:solidFill>
+                  <a:srgbClr val="1A1A1A"/>
+                </a:solidFill>
+                <a:latin typeface="Calibri"/>
+              </a:defRPr>
+            </a:pPr>
+            <a:r>
+              <a:t>Average bias score: 62.1% — most guidelines rated NOT USABLE for diversity analysis</a:t>
+            </a:r>
+          </a:p>
+          <a:p>
+            <a:pPr>
+              <a:spcAft>
+                <a:spcPts val="600"/>
+              </a:spcAft>
+              <a:defRPr sz="1700">
+                <a:solidFill>
+                  <a:srgbClr val="1A1A1A"/>
+                </a:solidFill>
+                <a:latin typeface="Calibri"/>
+              </a:defRPr>
+            </a:pPr>
+            <a:r>
+              <a:t>Only 32.5% of eligible studies report any race/ethnicity data on average</a:t>
+            </a:r>
+          </a:p>
+          <a:p>
+            <a:pPr>
+              <a:spcAft>
+                <a:spcPts val="600"/>
+              </a:spcAft>
+              <a:defRPr sz="1700">
+                <a:solidFill>
+                  <a:srgbClr val="1A1A1A"/>
+                </a:solidFill>
+                <a:latin typeface="Calibri"/>
+              </a:defRPr>
+            </a:pPr>
+            <a:r>
+              <a:t>ATA Thyroid 2015: 0% race reporting — publisher restricts PMC full-text access</a:t>
+            </a:r>
+          </a:p>
+          <a:p>
+            <a:pPr>
+              <a:spcAft>
+                <a:spcPts val="600"/>
+              </a:spcAft>
+              <a:defRPr sz="1700">
+                <a:solidFill>
+                  <a:srgbClr val="1A1A1A"/>
+                </a:solidFill>
+                <a:latin typeface="Calibri"/>
+              </a:defRPr>
+            </a:pPr>
+            <a:r>
+              <a:t>ADA Diabetes 2025: best race reporting among auto-extracted (45.7%)</a:t>
+            </a:r>
+          </a:p>
+          <a:p>
+            <a:pPr>
+              <a:spcAft>
+                <a:spcPts val="600"/>
+              </a:spcAft>
+              <a:defRPr sz="1700">
+                <a:solidFill>
+                  <a:srgbClr val="1A1A1A"/>
+                </a:solidFill>
+                <a:latin typeface="Calibri"/>
+              </a:defRPr>
+            </a:pPr>
+            <a:r>
+              <a:t>AACE Obesity 2016: 100% race reporting (manually curated — gold standard comparison)</a:t>
+            </a:r>
+          </a:p>
+          <a:p>
+            <a:pPr>
+              <a:spcAft>
+                <a:spcPts val="600"/>
+              </a:spcAft>
+              <a:defRPr sz="1700">
+                <a:solidFill>
+                  <a:srgbClr val="1A1A1A"/>
+                </a:solidFill>
+                <a:latin typeface="Calibri"/>
+              </a:defRPr>
+            </a:pPr>
+            <a:r>
+              <a:t>Total participants across all guidelines: 60M+ — massive evidence base with minimal demographic data</a:t>
+            </a:r>
+          </a:p>
+          <a:p>
+            <a:pPr>
+              <a:spcAft>
+                <a:spcPts val="600"/>
+              </a:spcAft>
+              <a:defRPr sz="1700">
+                <a:solidFill>
+                  <a:srgbClr val="1A1A1A"/>
+                </a:solidFill>
+                <a:latin typeface="Calibri"/>
+              </a:defRPr>
+            </a:pPr>
+            <a:r>
+              <a:t>Geographic bias: USA-centric (avg ~50-60% of studies from the US)</a:t>
+            </a:r>
+          </a:p>
+        </p:txBody>
+      </p:sp>
+      <p:sp>
+        <p:nvSpPr>
+          <p:cNvPr id="6" name="Rectangle 5"/>
           <p:cNvSpPr/>
           <p:nvPr/>
         </p:nvSpPr>
         <p:spPr>
           <a:xfrm>
-            <a:off x="457200" y="1188720"/>
-            <a:ext cx="5303520" cy="5029200"/>
+            <a:off x="640080" y="5303520"/>
+            <a:ext cx="10515600" cy="1097280"/>
           </a:xfrm>
           <a:prstGeom prst="rect">
             <a:avLst/>
           </a:prstGeom>
           <a:solidFill>
-            <a:srgbClr val="F7F7F7"/>
+            <a:srgbClr val="EBEBEB"/>
           </a:solidFill>
           <a:ln>
             <a:noFill/>
@@ -5560,14 +6834,14 @@
       </p:sp>
       <p:sp>
         <p:nvSpPr>
-          <p:cNvPr id="6" name="TextBox 5"/>
-          <p:cNvSpPr txBox="1"/>
-          <p:nvPr/>
-        </p:nvSpPr>
-        <p:spPr>
-          <a:xfrm>
-            <a:off x="731520" y="1371600"/>
-            <a:ext cx="4754880" cy="365760"/>
+          <p:cNvPr id="7" name="TextBox 6"/>
+          <p:cNvSpPr txBox="1"/>
+          <p:nvPr/>
+        </p:nvSpPr>
+        <p:spPr>
+          <a:xfrm>
+            <a:off x="822960" y="5394960"/>
+            <a:ext cx="10058400" cy="365760"/>
           </a:xfrm>
           <a:prstGeom prst="rect">
             <a:avLst/>
@@ -5581,46 +6855,7 @@
           <a:lstStyle/>
           <a:p>
             <a:pPr algn="l">
-              <a:defRPr sz="2000" b="1">
-                <a:solidFill>
-                  <a:srgbClr val="808080"/>
-                </a:solidFill>
-                <a:latin typeface="Calibri"/>
-              </a:defRPr>
-            </a:pPr>
-            <a:r>
-              <a:t>Previous Approach (Manual)</a:t>
-            </a:r>
-          </a:p>
-        </p:txBody>
-      </p:sp>
-      <p:sp>
-        <p:nvSpPr>
-          <p:cNvPr id="7" name="TextBox 6"/>
-          <p:cNvSpPr txBox="1"/>
-          <p:nvPr/>
-        </p:nvSpPr>
-        <p:spPr>
-          <a:xfrm>
-            <a:off x="731520" y="1828800"/>
-            <a:ext cx="4754880" cy="4114800"/>
-          </a:xfrm>
-          <a:prstGeom prst="rect">
-            <a:avLst/>
-          </a:prstGeom>
-          <a:noFill/>
-        </p:spPr>
-        <p:txBody>
-          <a:bodyPr wrap="square">
-            <a:spAutoFit/>
-          </a:bodyPr>
-          <a:lstStyle/>
-          <a:p>
-            <a:pPr>
-              <a:spcAft>
-                <a:spcPts val="600"/>
-              </a:spcAft>
-              <a:defRPr sz="1500">
+              <a:defRPr sz="1500" b="1">
                 <a:solidFill>
                   <a:srgbClr val="1A1A1A"/>
                 </a:solidFill>
@@ -5628,324 +6863,14 @@
               </a:defRPr>
             </a:pPr>
             <a:r>
-              <a:t>Parse guideline PDF manually</a:t>
-            </a:r>
-          </a:p>
-          <a:p>
-            <a:pPr>
-              <a:spcAft>
-                <a:spcPts val="600"/>
-              </a:spcAft>
-              <a:defRPr sz="1500">
-                <a:solidFill>
-                  <a:srgbClr val="1A1A1A"/>
-                </a:solidFill>
-                <a:latin typeface="Calibri"/>
-              </a:defRPr>
-            </a:pPr>
-            <a:r>
-              <a:t>Look up each cited study one by one</a:t>
-            </a:r>
-          </a:p>
-          <a:p>
-            <a:pPr>
-              <a:spcAft>
-                <a:spcPts val="600"/>
-              </a:spcAft>
-              <a:defRPr sz="1500">
-                <a:solidFill>
-                  <a:srgbClr val="1A1A1A"/>
-                </a:solidFill>
-                <a:latin typeface="Calibri"/>
-              </a:defRPr>
-            </a:pPr>
-            <a:r>
-              <a:t>Read full-text PDFs for each study</a:t>
-            </a:r>
-          </a:p>
-          <a:p>
-            <a:pPr>
-              <a:spcAft>
-                <a:spcPts val="600"/>
-              </a:spcAft>
-              <a:defRPr sz="1500">
-                <a:solidFill>
-                  <a:srgbClr val="1A1A1A"/>
-                </a:solidFill>
-                <a:latin typeface="Calibri"/>
-              </a:defRPr>
-            </a:pPr>
-            <a:r>
-              <a:t>Manually extract demographics into spreadsheet</a:t>
-            </a:r>
-          </a:p>
-          <a:p>
-            <a:pPr>
-              <a:spcAft>
-                <a:spcPts val="600"/>
-              </a:spcAft>
-              <a:defRPr sz="1500">
-                <a:solidFill>
-                  <a:srgbClr val="1A1A1A"/>
-                </a:solidFill>
-                <a:latin typeface="Calibri"/>
-              </a:defRPr>
-            </a:pPr>
-            <a:r>
-              <a:t>~40+ hours per guideline</a:t>
-            </a:r>
-          </a:p>
-          <a:p>
-            <a:pPr>
-              <a:spcAft>
-                <a:spcPts val="600"/>
-              </a:spcAft>
-              <a:defRPr sz="1500">
-                <a:solidFill>
-                  <a:srgbClr val="1A1A1A"/>
-                </a:solidFill>
-                <a:latin typeface="Calibri"/>
-              </a:defRPr>
-            </a:pPr>
-            <a:r>
-              <a:t>Error-prone, hard to reproduce</a:t>
-            </a:r>
-          </a:p>
-          <a:p>
-            <a:pPr>
-              <a:spcAft>
-                <a:spcPts val="600"/>
-              </a:spcAft>
-              <a:defRPr sz="1500">
-                <a:solidFill>
-                  <a:srgbClr val="1A1A1A"/>
-                </a:solidFill>
-                <a:latin typeface="Calibri"/>
-              </a:defRPr>
-            </a:pPr>
-            <a:r>
-              <a:t>Limited to small sample sizes</a:t>
-            </a:r>
-          </a:p>
-        </p:txBody>
-      </p:sp>
-      <p:sp>
-        <p:nvSpPr>
-          <p:cNvPr id="8" name="Rectangle 7"/>
-          <p:cNvSpPr/>
-          <p:nvPr/>
-        </p:nvSpPr>
-        <p:spPr>
-          <a:xfrm>
-            <a:off x="6400800" y="1188720"/>
-            <a:ext cx="5303520" cy="5029200"/>
-          </a:xfrm>
-          <a:prstGeom prst="rect">
-            <a:avLst/>
-          </a:prstGeom>
-          <a:solidFill>
-            <a:srgbClr val="F2D5DA"/>
-          </a:solidFill>
-          <a:ln>
-            <a:noFill/>
-          </a:ln>
-        </p:spPr>
-        <p:style>
-          <a:lnRef idx="1">
-            <a:schemeClr val="accent1"/>
-          </a:lnRef>
-          <a:fillRef idx="3">
-            <a:schemeClr val="accent1"/>
-          </a:fillRef>
-          <a:effectRef idx="2">
-            <a:schemeClr val="accent1"/>
-          </a:effectRef>
-          <a:fontRef idx="minor">
-            <a:schemeClr val="lt1"/>
-          </a:fontRef>
-        </p:style>
-        <p:txBody>
-          <a:bodyPr rtlCol="0" anchor="ctr"/>
-          <a:lstStyle/>
-          <a:p>
-            <a:pPr algn="ctr"/>
-          </a:p>
-        </p:txBody>
-      </p:sp>
-      <p:sp>
-        <p:nvSpPr>
-          <p:cNvPr id="9" name="TextBox 8"/>
-          <p:cNvSpPr txBox="1"/>
-          <p:nvPr/>
-        </p:nvSpPr>
-        <p:spPr>
-          <a:xfrm>
-            <a:off x="6675120" y="1371600"/>
-            <a:ext cx="4754880" cy="365760"/>
-          </a:xfrm>
-          <a:prstGeom prst="rect">
-            <a:avLst/>
-          </a:prstGeom>
-          <a:noFill/>
-        </p:spPr>
-        <p:txBody>
-          <a:bodyPr wrap="square">
-            <a:spAutoFit/>
-          </a:bodyPr>
-          <a:lstStyle/>
-          <a:p>
-            <a:pPr algn="l">
-              <a:defRPr sz="2000" b="1">
-                <a:solidFill>
-                  <a:srgbClr val="9B1B30"/>
-                </a:solidFill>
-                <a:latin typeface="Calibri"/>
-              </a:defRPr>
-            </a:pPr>
-            <a:r>
-              <a:t>RADAR (Automated)</a:t>
-            </a:r>
-          </a:p>
-        </p:txBody>
-      </p:sp>
-      <p:sp>
-        <p:nvSpPr>
-          <p:cNvPr id="10" name="TextBox 9"/>
-          <p:cNvSpPr txBox="1"/>
-          <p:nvPr/>
-        </p:nvSpPr>
-        <p:spPr>
-          <a:xfrm>
-            <a:off x="6675120" y="1828800"/>
-            <a:ext cx="4754880" cy="4114800"/>
-          </a:xfrm>
-          <a:prstGeom prst="rect">
-            <a:avLst/>
-          </a:prstGeom>
-          <a:noFill/>
-        </p:spPr>
-        <p:txBody>
-          <a:bodyPr wrap="square">
-            <a:spAutoFit/>
-          </a:bodyPr>
-          <a:lstStyle/>
-          <a:p>
-            <a:pPr>
-              <a:spcAft>
-                <a:spcPts val="600"/>
-              </a:spcAft>
-              <a:defRPr sz="1500">
-                <a:solidFill>
-                  <a:srgbClr val="1A1A1A"/>
-                </a:solidFill>
-                <a:latin typeface="Calibri"/>
-              </a:defRPr>
-            </a:pPr>
-            <a:r>
-              <a:t>Enter DOI → fully automated</a:t>
-            </a:r>
-          </a:p>
-          <a:p>
-            <a:pPr>
-              <a:spcAft>
-                <a:spcPts val="600"/>
-              </a:spcAft>
-              <a:defRPr sz="1500">
-                <a:solidFill>
-                  <a:srgbClr val="1A1A1A"/>
-                </a:solidFill>
-                <a:latin typeface="Calibri"/>
-              </a:defRPr>
-            </a:pPr>
-            <a:r>
-              <a:t>CrossRef API fetches all references</a:t>
-            </a:r>
-          </a:p>
-          <a:p>
-            <a:pPr>
-              <a:spcAft>
-                <a:spcPts val="600"/>
-              </a:spcAft>
-              <a:defRPr sz="1500">
-                <a:solidFill>
-                  <a:srgbClr val="1A1A1A"/>
-                </a:solidFill>
-                <a:latin typeface="Calibri"/>
-              </a:defRPr>
-            </a:pPr>
-            <a:r>
-              <a:t>PMC full-text XML parsed for demographics</a:t>
-            </a:r>
-          </a:p>
-          <a:p>
-            <a:pPr>
-              <a:spcAft>
-                <a:spcPts val="600"/>
-              </a:spcAft>
-              <a:defRPr sz="1500">
-                <a:solidFill>
-                  <a:srgbClr val="1A1A1A"/>
-                </a:solidFill>
-                <a:latin typeface="Calibri"/>
-              </a:defRPr>
-            </a:pPr>
-            <a:r>
-              <a:t>NCBI E-utilities for PubMed enrichment</a:t>
-            </a:r>
-          </a:p>
-          <a:p>
-            <a:pPr>
-              <a:spcAft>
-                <a:spcPts val="600"/>
-              </a:spcAft>
-              <a:defRPr sz="1500">
-                <a:solidFill>
-                  <a:srgbClr val="1A1A1A"/>
-                </a:solidFill>
-                <a:latin typeface="Calibri"/>
-              </a:defRPr>
-            </a:pPr>
-            <a:r>
-              <a:t>~2-4 minutes per guideline</a:t>
-            </a:r>
-          </a:p>
-          <a:p>
-            <a:pPr>
-              <a:spcAft>
-                <a:spcPts val="600"/>
-              </a:spcAft>
-              <a:defRPr sz="1500">
-                <a:solidFill>
-                  <a:srgbClr val="1A1A1A"/>
-                </a:solidFill>
-                <a:latin typeface="Calibri"/>
-              </a:defRPr>
-            </a:pPr>
-            <a:r>
-              <a:t>Fully reproducible, consistent</a:t>
-            </a:r>
-          </a:p>
-          <a:p>
-            <a:pPr>
-              <a:spcAft>
-                <a:spcPts val="600"/>
-              </a:spcAft>
-              <a:defRPr sz="1500">
-                <a:solidFill>
-                  <a:srgbClr val="1A1A1A"/>
-                </a:solidFill>
-                <a:latin typeface="Calibri"/>
-              </a:defRPr>
-            </a:pPr>
-            <a:r>
-              <a:t>Scales to 1000+ cited studies</a:t>
-            </a:r>
-          </a:p>
-        </p:txBody>
-      </p:sp>
-      <p:sp>
-        <p:nvSpPr>
-          <p:cNvPr id="11" name="TextBox 10"/>
+              <a:t>Verdict: 4 of 5 guidelines are NOT USABLE (&lt;30% race reporting). Only Obesity 2016 (manually curated) is USABLE.</a:t>
+            </a:r>
+          </a:p>
+        </p:txBody>
+      </p:sp>
+      <p:sp>
+        <p:nvSpPr>
+          <p:cNvPr id="8" name="TextBox 7"/>
           <p:cNvSpPr txBox="1"/>
           <p:nvPr/>
         </p:nvSpPr>
@@ -5974,7 +6899,7 @@
               </a:defRPr>
             </a:pPr>
             <a:r>
-              <a:t>12 / 14</a:t>
+              <a:t>12/15</a:t>
             </a:r>
           </a:p>
         </p:txBody>
@@ -6079,7 +7004,7 @@
               </a:defRPr>
             </a:pPr>
             <a:r>
-              <a:t>Limitations &amp; Next Steps</a:t>
+              <a:t>Manual vs Automated</a:t>
             </a:r>
           </a:p>
         </p:txBody>
@@ -6129,14 +7054,57 @@
       </p:sp>
       <p:sp>
         <p:nvSpPr>
-          <p:cNvPr id="5" name="TextBox 4"/>
-          <p:cNvSpPr txBox="1"/>
+          <p:cNvPr id="5" name="Rectangle 4"/>
+          <p:cNvSpPr/>
           <p:nvPr/>
         </p:nvSpPr>
         <p:spPr>
           <a:xfrm>
             <a:off x="457200" y="1188720"/>
-            <a:ext cx="5029200" cy="365760"/>
+            <a:ext cx="5303520" cy="5029200"/>
+          </a:xfrm>
+          <a:prstGeom prst="rect">
+            <a:avLst/>
+          </a:prstGeom>
+          <a:solidFill>
+            <a:srgbClr val="F7F7F7"/>
+          </a:solidFill>
+          <a:ln>
+            <a:noFill/>
+          </a:ln>
+        </p:spPr>
+        <p:style>
+          <a:lnRef idx="1">
+            <a:schemeClr val="accent1"/>
+          </a:lnRef>
+          <a:fillRef idx="3">
+            <a:schemeClr val="accent1"/>
+          </a:fillRef>
+          <a:effectRef idx="2">
+            <a:schemeClr val="accent1"/>
+          </a:effectRef>
+          <a:fontRef idx="minor">
+            <a:schemeClr val="lt1"/>
+          </a:fontRef>
+        </p:style>
+        <p:txBody>
+          <a:bodyPr rtlCol="0" anchor="ctr"/>
+          <a:lstStyle/>
+          <a:p>
+            <a:pPr algn="ctr"/>
+          </a:p>
+        </p:txBody>
+      </p:sp>
+      <p:sp>
+        <p:nvSpPr>
+          <p:cNvPr id="6" name="TextBox 5"/>
+          <p:cNvSpPr txBox="1"/>
+          <p:nvPr/>
+        </p:nvSpPr>
+        <p:spPr>
+          <a:xfrm>
+            <a:off x="731520" y="1371600"/>
+            <a:ext cx="4754880" cy="365760"/>
           </a:xfrm>
           <a:prstGeom prst="rect">
             <a:avLst/>
@@ -6150,7 +7118,7 @@
           <a:lstStyle/>
           <a:p>
             <a:pPr algn="l">
-              <a:defRPr sz="2200" b="1">
+              <a:defRPr sz="2000" b="1">
                 <a:solidFill>
                   <a:srgbClr val="808080"/>
                 </a:solidFill>
@@ -6158,21 +7126,21 @@
               </a:defRPr>
             </a:pPr>
             <a:r>
-              <a:t>Limitations</a:t>
-            </a:r>
-          </a:p>
-        </p:txBody>
-      </p:sp>
-      <p:sp>
-        <p:nvSpPr>
-          <p:cNvPr id="6" name="TextBox 5"/>
-          <p:cNvSpPr txBox="1"/>
-          <p:nvPr/>
-        </p:nvSpPr>
-        <p:spPr>
-          <a:xfrm>
-            <a:off x="457200" y="1645920"/>
-            <a:ext cx="5029200" cy="4114800"/>
+              <a:t>Previous Approach (Manual)</a:t>
+            </a:r>
+          </a:p>
+        </p:txBody>
+      </p:sp>
+      <p:sp>
+        <p:nvSpPr>
+          <p:cNvPr id="7" name="TextBox 6"/>
+          <p:cNvSpPr txBox="1"/>
+          <p:nvPr/>
+        </p:nvSpPr>
+        <p:spPr>
+          <a:xfrm>
+            <a:off x="731520" y="1828800"/>
+            <a:ext cx="4754880" cy="4114800"/>
           </a:xfrm>
           <a:prstGeom prst="rect">
             <a:avLst/>
@@ -6197,7 +7165,7 @@
               </a:defRPr>
             </a:pPr>
             <a:r>
-              <a:t>PMC full-text availability: publishers restrict access (Wolters Kluwer, Mary Ann Liebert) → 0% race data for ATA Thyroid</a:t>
+              <a:t>Parse guideline PDF manually</a:t>
             </a:r>
           </a:p>
           <a:p>
@@ -6213,7 +7181,7 @@
               </a:defRPr>
             </a:pPr>
             <a:r>
-              <a:t>Demographic extraction from XML text limited by table formatting variability</a:t>
+              <a:t>Look up each cited study one by one</a:t>
             </a:r>
           </a:p>
           <a:p>
@@ -6229,7 +7197,7 @@
               </a:defRPr>
             </a:pPr>
             <a:r>
-              <a:t>Race categories standardized to 5 major groups — may miss granular ethnicity data</a:t>
+              <a:t>Read full-text PDFs for each study</a:t>
             </a:r>
           </a:p>
           <a:p>
@@ -6245,7 +7213,7 @@
               </a:defRPr>
             </a:pPr>
             <a:r>
-              <a:t>Abstract-only fallback has low demographic yield</a:t>
+              <a:t>Manually extract demographics into spreadsheet</a:t>
             </a:r>
           </a:p>
           <a:p>
@@ -6261,68 +7229,9 @@
               </a:defRPr>
             </a:pPr>
             <a:r>
-              <a:t>CrossRef reference quality varies by publisher</a:t>
-            </a:r>
-          </a:p>
-        </p:txBody>
-      </p:sp>
-      <p:sp>
-        <p:nvSpPr>
-          <p:cNvPr id="7" name="TextBox 6"/>
-          <p:cNvSpPr txBox="1"/>
-          <p:nvPr/>
-        </p:nvSpPr>
-        <p:spPr>
-          <a:xfrm>
-            <a:off x="5943600" y="1188720"/>
-            <a:ext cx="5486400" cy="365760"/>
-          </a:xfrm>
-          <a:prstGeom prst="rect">
-            <a:avLst/>
-          </a:prstGeom>
-          <a:noFill/>
-        </p:spPr>
-        <p:txBody>
-          <a:bodyPr wrap="square">
-            <a:spAutoFit/>
-          </a:bodyPr>
-          <a:lstStyle/>
-          <a:p>
-            <a:pPr algn="l">
-              <a:defRPr sz="2200" b="1">
-                <a:solidFill>
-                  <a:srgbClr val="9B1B30"/>
-                </a:solidFill>
-                <a:latin typeface="Calibri"/>
-              </a:defRPr>
-            </a:pPr>
-            <a:r>
-              <a:t>Next Steps</a:t>
-            </a:r>
-          </a:p>
-        </p:txBody>
-      </p:sp>
-      <p:sp>
-        <p:nvSpPr>
-          <p:cNvPr id="8" name="TextBox 7"/>
-          <p:cNvSpPr txBox="1"/>
-          <p:nvPr/>
-        </p:nvSpPr>
-        <p:spPr>
-          <a:xfrm>
-            <a:off x="5943600" y="1645920"/>
-            <a:ext cx="5760720" cy="4114800"/>
-          </a:xfrm>
-          <a:prstGeom prst="rect">
-            <a:avLst/>
-          </a:prstGeom>
-          <a:noFill/>
-        </p:spPr>
-        <p:txBody>
-          <a:bodyPr wrap="square">
-            <a:spAutoFit/>
-          </a:bodyPr>
-          <a:lstStyle/>
+              <a:t>~40+ hours per guideline</a:t>
+            </a:r>
+          </a:p>
           <a:p>
             <a:pPr>
               <a:spcAft>
@@ -6336,7 +7245,7 @@
               </a:defRPr>
             </a:pPr>
             <a:r>
-              <a:t>Add more guidelines across diverse specialties &amp; publishers</a:t>
+              <a:t>Error-prone, hard to reproduce</a:t>
             </a:r>
           </a:p>
           <a:p>
@@ -6352,9 +7261,111 @@
               </a:defRPr>
             </a:pPr>
             <a:r>
-              <a:t>Improve PMC table extraction with structural table parsing</a:t>
-            </a:r>
-          </a:p>
+              <a:t>Limited to small sample sizes</a:t>
+            </a:r>
+          </a:p>
+        </p:txBody>
+      </p:sp>
+      <p:sp>
+        <p:nvSpPr>
+          <p:cNvPr id="8" name="Rectangle 7"/>
+          <p:cNvSpPr/>
+          <p:nvPr/>
+        </p:nvSpPr>
+        <p:spPr>
+          <a:xfrm>
+            <a:off x="6400800" y="1188720"/>
+            <a:ext cx="5303520" cy="5029200"/>
+          </a:xfrm>
+          <a:prstGeom prst="rect">
+            <a:avLst/>
+          </a:prstGeom>
+          <a:solidFill>
+            <a:srgbClr val="F2D5DA"/>
+          </a:solidFill>
+          <a:ln>
+            <a:noFill/>
+          </a:ln>
+        </p:spPr>
+        <p:style>
+          <a:lnRef idx="1">
+            <a:schemeClr val="accent1"/>
+          </a:lnRef>
+          <a:fillRef idx="3">
+            <a:schemeClr val="accent1"/>
+          </a:fillRef>
+          <a:effectRef idx="2">
+            <a:schemeClr val="accent1"/>
+          </a:effectRef>
+          <a:fontRef idx="minor">
+            <a:schemeClr val="lt1"/>
+          </a:fontRef>
+        </p:style>
+        <p:txBody>
+          <a:bodyPr rtlCol="0" anchor="ctr"/>
+          <a:lstStyle/>
+          <a:p>
+            <a:pPr algn="ctr"/>
+          </a:p>
+        </p:txBody>
+      </p:sp>
+      <p:sp>
+        <p:nvSpPr>
+          <p:cNvPr id="9" name="TextBox 8"/>
+          <p:cNvSpPr txBox="1"/>
+          <p:nvPr/>
+        </p:nvSpPr>
+        <p:spPr>
+          <a:xfrm>
+            <a:off x="6675120" y="1371600"/>
+            <a:ext cx="4754880" cy="365760"/>
+          </a:xfrm>
+          <a:prstGeom prst="rect">
+            <a:avLst/>
+          </a:prstGeom>
+          <a:noFill/>
+        </p:spPr>
+        <p:txBody>
+          <a:bodyPr wrap="square">
+            <a:spAutoFit/>
+          </a:bodyPr>
+          <a:lstStyle/>
+          <a:p>
+            <a:pPr algn="l">
+              <a:defRPr sz="2000" b="1">
+                <a:solidFill>
+                  <a:srgbClr val="9B1B30"/>
+                </a:solidFill>
+                <a:latin typeface="Calibri"/>
+              </a:defRPr>
+            </a:pPr>
+            <a:r>
+              <a:t>RADAR (Automated)</a:t>
+            </a:r>
+          </a:p>
+        </p:txBody>
+      </p:sp>
+      <p:sp>
+        <p:nvSpPr>
+          <p:cNvPr id="10" name="TextBox 9"/>
+          <p:cNvSpPr txBox="1"/>
+          <p:nvPr/>
+        </p:nvSpPr>
+        <p:spPr>
+          <a:xfrm>
+            <a:off x="6675120" y="1828800"/>
+            <a:ext cx="4754880" cy="4114800"/>
+          </a:xfrm>
+          <a:prstGeom prst="rect">
+            <a:avLst/>
+          </a:prstGeom>
+          <a:noFill/>
+        </p:spPr>
+        <p:txBody>
+          <a:bodyPr wrap="square">
+            <a:spAutoFit/>
+          </a:bodyPr>
+          <a:lstStyle/>
           <a:p>
             <a:pPr>
               <a:spcAft>
@@ -6368,7 +7379,7 @@
               </a:defRPr>
             </a:pPr>
             <a:r>
-              <a:t>Add author demographic analysis (gender, geographic diversity of authors)</a:t>
+              <a:t>Enter DOI → fully automated</a:t>
             </a:r>
           </a:p>
           <a:p>
@@ -6384,7 +7395,7 @@
               </a:defRPr>
             </a:pPr>
             <a:r>
-              <a:t>Deploy public API for live interactive use by research community</a:t>
+              <a:t>CrossRef API fetches all references</a:t>
             </a:r>
           </a:p>
           <a:p>
@@ -6400,7 +7411,7 @@
               </a:defRPr>
             </a:pPr>
             <a:r>
-              <a:t>Integrate manual verification step for high-confidence results</a:t>
+              <a:t>PMC full-text XML parsed for demographics</a:t>
             </a:r>
           </a:p>
           <a:p>
@@ -6416,7 +7427,7 @@
               </a:defRPr>
             </a:pPr>
             <a:r>
-              <a:t>Expand race categories to match local/regional reporting standards</a:t>
+              <a:t>NCBI E-utilities for PubMed enrichment</a:t>
             </a:r>
           </a:p>
           <a:p>
@@ -6432,14 +7443,46 @@
               </a:defRPr>
             </a:pPr>
             <a:r>
-              <a:t>Longitudinal analysis: track demographic reporting trends over time</a:t>
-            </a:r>
-          </a:p>
-        </p:txBody>
-      </p:sp>
-      <p:sp>
-        <p:nvSpPr>
-          <p:cNvPr id="9" name="TextBox 8"/>
+              <a:t>~2-4 minutes per guideline</a:t>
+            </a:r>
+          </a:p>
+          <a:p>
+            <a:pPr>
+              <a:spcAft>
+                <a:spcPts val="600"/>
+              </a:spcAft>
+              <a:defRPr sz="1500">
+                <a:solidFill>
+                  <a:srgbClr val="1A1A1A"/>
+                </a:solidFill>
+                <a:latin typeface="Calibri"/>
+              </a:defRPr>
+            </a:pPr>
+            <a:r>
+              <a:t>Fully reproducible, consistent</a:t>
+            </a:r>
+          </a:p>
+          <a:p>
+            <a:pPr>
+              <a:spcAft>
+                <a:spcPts val="600"/>
+              </a:spcAft>
+              <a:defRPr sz="1500">
+                <a:solidFill>
+                  <a:srgbClr val="1A1A1A"/>
+                </a:solidFill>
+                <a:latin typeface="Calibri"/>
+              </a:defRPr>
+            </a:pPr>
+            <a:r>
+              <a:t>Scales to 1000+ cited studies</a:t>
+            </a:r>
+          </a:p>
+        </p:txBody>
+      </p:sp>
+      <p:sp>
+        <p:nvSpPr>
+          <p:cNvPr id="11" name="TextBox 10"/>
           <p:cNvSpPr txBox="1"/>
           <p:nvPr/>
         </p:nvSpPr>
@@ -6468,7 +7511,7 @@
               </a:defRPr>
             </a:pPr>
             <a:r>
-              <a:t>13 / 14</a:t>
+              <a:t>13/15</a:t>
             </a:r>
           </a:p>
         </p:txBody>
@@ -6482,6 +7525,452 @@
 </file>
 
 <file path=ppt/slides/slide14.xml><?xml version="1.0" encoding="utf-8"?>
+<p:sld xmlns:a="http://schemas.openxmlformats.org/drawingml/2006/main" xmlns:p="http://schemas.openxmlformats.org/presentationml/2006/main" xmlns:r="http://schemas.openxmlformats.org/officeDocument/2006/relationships">
+  <p:cSld>
+    <p:bg>
+      <p:bgPr>
+        <a:solidFill>
+          <a:srgbClr val="FFFFFF"/>
+        </a:solidFill>
+        <a:effectLst/>
+      </p:bgPr>
+    </p:bg>
+    <p:spTree>
+      <p:nvGrpSpPr>
+        <p:cNvPr id="1" name=""/>
+        <p:cNvGrpSpPr/>
+        <p:nvPr/>
+      </p:nvGrpSpPr>
+      <p:grpSpPr/>
+      <p:sp>
+        <p:nvSpPr>
+          <p:cNvPr id="2" name="Rectangle 1"/>
+          <p:cNvSpPr/>
+          <p:nvPr/>
+        </p:nvSpPr>
+        <p:spPr>
+          <a:xfrm>
+            <a:off x="0" y="0"/>
+            <a:ext cx="73152" cy="6858000"/>
+          </a:xfrm>
+          <a:prstGeom prst="rect">
+            <a:avLst/>
+          </a:prstGeom>
+          <a:solidFill>
+            <a:srgbClr val="9B1B30"/>
+          </a:solidFill>
+          <a:ln>
+            <a:noFill/>
+          </a:ln>
+        </p:spPr>
+        <p:style>
+          <a:lnRef idx="1">
+            <a:schemeClr val="accent1"/>
+          </a:lnRef>
+          <a:fillRef idx="3">
+            <a:schemeClr val="accent1"/>
+          </a:fillRef>
+          <a:effectRef idx="2">
+            <a:schemeClr val="accent1"/>
+          </a:effectRef>
+          <a:fontRef idx="minor">
+            <a:schemeClr val="lt1"/>
+          </a:fontRef>
+        </p:style>
+        <p:txBody>
+          <a:bodyPr rtlCol="0" anchor="ctr"/>
+          <a:lstStyle/>
+          <a:p>
+            <a:pPr algn="ctr"/>
+          </a:p>
+        </p:txBody>
+      </p:sp>
+      <p:sp>
+        <p:nvSpPr>
+          <p:cNvPr id="3" name="TextBox 2"/>
+          <p:cNvSpPr txBox="1"/>
+          <p:nvPr/>
+        </p:nvSpPr>
+        <p:spPr>
+          <a:xfrm>
+            <a:off x="457200" y="274320"/>
+            <a:ext cx="10972800" cy="548640"/>
+          </a:xfrm>
+          <a:prstGeom prst="rect">
+            <a:avLst/>
+          </a:prstGeom>
+          <a:noFill/>
+        </p:spPr>
+        <p:txBody>
+          <a:bodyPr wrap="square">
+            <a:spAutoFit/>
+          </a:bodyPr>
+          <a:lstStyle/>
+          <a:p>
+            <a:pPr algn="l">
+              <a:defRPr sz="3600" b="1">
+                <a:solidFill>
+                  <a:srgbClr val="9B1B30"/>
+                </a:solidFill>
+                <a:latin typeface="Calibri"/>
+              </a:defRPr>
+            </a:pPr>
+            <a:r>
+              <a:t>Limitations &amp; Next Steps</a:t>
+            </a:r>
+          </a:p>
+        </p:txBody>
+      </p:sp>
+      <p:sp>
+        <p:nvSpPr>
+          <p:cNvPr id="4" name="Rectangle 3"/>
+          <p:cNvSpPr/>
+          <p:nvPr/>
+        </p:nvSpPr>
+        <p:spPr>
+          <a:xfrm>
+            <a:off x="457200" y="868680"/>
+            <a:ext cx="2743200" cy="36576"/>
+          </a:xfrm>
+          <a:prstGeom prst="rect">
+            <a:avLst/>
+          </a:prstGeom>
+          <a:solidFill>
+            <a:srgbClr val="9B1B30"/>
+          </a:solidFill>
+          <a:ln>
+            <a:noFill/>
+          </a:ln>
+        </p:spPr>
+        <p:style>
+          <a:lnRef idx="1">
+            <a:schemeClr val="accent1"/>
+          </a:lnRef>
+          <a:fillRef idx="3">
+            <a:schemeClr val="accent1"/>
+          </a:fillRef>
+          <a:effectRef idx="2">
+            <a:schemeClr val="accent1"/>
+          </a:effectRef>
+          <a:fontRef idx="minor">
+            <a:schemeClr val="lt1"/>
+          </a:fontRef>
+        </p:style>
+        <p:txBody>
+          <a:bodyPr rtlCol="0" anchor="ctr"/>
+          <a:lstStyle/>
+          <a:p>
+            <a:pPr algn="ctr"/>
+          </a:p>
+        </p:txBody>
+      </p:sp>
+      <p:sp>
+        <p:nvSpPr>
+          <p:cNvPr id="5" name="TextBox 4"/>
+          <p:cNvSpPr txBox="1"/>
+          <p:nvPr/>
+        </p:nvSpPr>
+        <p:spPr>
+          <a:xfrm>
+            <a:off x="457200" y="1188720"/>
+            <a:ext cx="5029200" cy="365760"/>
+          </a:xfrm>
+          <a:prstGeom prst="rect">
+            <a:avLst/>
+          </a:prstGeom>
+          <a:noFill/>
+        </p:spPr>
+        <p:txBody>
+          <a:bodyPr wrap="square">
+            <a:spAutoFit/>
+          </a:bodyPr>
+          <a:lstStyle/>
+          <a:p>
+            <a:pPr algn="l">
+              <a:defRPr sz="2200" b="1">
+                <a:solidFill>
+                  <a:srgbClr val="808080"/>
+                </a:solidFill>
+                <a:latin typeface="Calibri"/>
+              </a:defRPr>
+            </a:pPr>
+            <a:r>
+              <a:t>Limitations</a:t>
+            </a:r>
+          </a:p>
+        </p:txBody>
+      </p:sp>
+      <p:sp>
+        <p:nvSpPr>
+          <p:cNvPr id="6" name="TextBox 5"/>
+          <p:cNvSpPr txBox="1"/>
+          <p:nvPr/>
+        </p:nvSpPr>
+        <p:spPr>
+          <a:xfrm>
+            <a:off x="457200" y="1645920"/>
+            <a:ext cx="5029200" cy="4114800"/>
+          </a:xfrm>
+          <a:prstGeom prst="rect">
+            <a:avLst/>
+          </a:prstGeom>
+          <a:noFill/>
+        </p:spPr>
+        <p:txBody>
+          <a:bodyPr wrap="square">
+            <a:spAutoFit/>
+          </a:bodyPr>
+          <a:lstStyle/>
+          <a:p>
+            <a:pPr>
+              <a:spcAft>
+                <a:spcPts val="600"/>
+              </a:spcAft>
+              <a:defRPr sz="1500">
+                <a:solidFill>
+                  <a:srgbClr val="1A1A1A"/>
+                </a:solidFill>
+                <a:latin typeface="Calibri"/>
+              </a:defRPr>
+            </a:pPr>
+            <a:r>
+              <a:t>PMC full-text availability varies by publisher</a:t>
+            </a:r>
+          </a:p>
+          <a:p>
+            <a:pPr>
+              <a:spcAft>
+                <a:spcPts val="600"/>
+              </a:spcAft>
+              <a:defRPr sz="1500">
+                <a:solidFill>
+                  <a:srgbClr val="1A1A1A"/>
+                </a:solidFill>
+                <a:latin typeface="Calibri"/>
+              </a:defRPr>
+            </a:pPr>
+            <a:r>
+              <a:t>Table formatting variability affects extraction</a:t>
+            </a:r>
+          </a:p>
+          <a:p>
+            <a:pPr>
+              <a:spcAft>
+                <a:spcPts val="600"/>
+              </a:spcAft>
+              <a:defRPr sz="1500">
+                <a:solidFill>
+                  <a:srgbClr val="1A1A1A"/>
+                </a:solidFill>
+                <a:latin typeface="Calibri"/>
+              </a:defRPr>
+            </a:pPr>
+            <a:r>
+              <a:t>Race categories limited to 5 major groups</a:t>
+            </a:r>
+          </a:p>
+          <a:p>
+            <a:pPr>
+              <a:spcAft>
+                <a:spcPts val="600"/>
+              </a:spcAft>
+              <a:defRPr sz="1500">
+                <a:solidFill>
+                  <a:srgbClr val="1A1A1A"/>
+                </a:solidFill>
+                <a:latin typeface="Calibri"/>
+              </a:defRPr>
+            </a:pPr>
+            <a:r>
+              <a:t>Abstract-only fallback has low demographic yield</a:t>
+            </a:r>
+          </a:p>
+        </p:txBody>
+      </p:sp>
+      <p:sp>
+        <p:nvSpPr>
+          <p:cNvPr id="7" name="TextBox 6"/>
+          <p:cNvSpPr txBox="1"/>
+          <p:nvPr/>
+        </p:nvSpPr>
+        <p:spPr>
+          <a:xfrm>
+            <a:off x="5943600" y="1188720"/>
+            <a:ext cx="5486400" cy="365760"/>
+          </a:xfrm>
+          <a:prstGeom prst="rect">
+            <a:avLst/>
+          </a:prstGeom>
+          <a:noFill/>
+        </p:spPr>
+        <p:txBody>
+          <a:bodyPr wrap="square">
+            <a:spAutoFit/>
+          </a:bodyPr>
+          <a:lstStyle/>
+          <a:p>
+            <a:pPr algn="l">
+              <a:defRPr sz="2200" b="1">
+                <a:solidFill>
+                  <a:srgbClr val="9B1B30"/>
+                </a:solidFill>
+                <a:latin typeface="Calibri"/>
+              </a:defRPr>
+            </a:pPr>
+            <a:r>
+              <a:t>Next Steps</a:t>
+            </a:r>
+          </a:p>
+        </p:txBody>
+      </p:sp>
+      <p:sp>
+        <p:nvSpPr>
+          <p:cNvPr id="8" name="TextBox 7"/>
+          <p:cNvSpPr txBox="1"/>
+          <p:nvPr/>
+        </p:nvSpPr>
+        <p:spPr>
+          <a:xfrm>
+            <a:off x="5943600" y="1645920"/>
+            <a:ext cx="5760720" cy="4114800"/>
+          </a:xfrm>
+          <a:prstGeom prst="rect">
+            <a:avLst/>
+          </a:prstGeom>
+          <a:noFill/>
+        </p:spPr>
+        <p:txBody>
+          <a:bodyPr wrap="square">
+            <a:spAutoFit/>
+          </a:bodyPr>
+          <a:lstStyle/>
+          <a:p>
+            <a:pPr>
+              <a:spcAft>
+                <a:spcPts val="600"/>
+              </a:spcAft>
+              <a:defRPr sz="1500">
+                <a:solidFill>
+                  <a:srgbClr val="1A1A1A"/>
+                </a:solidFill>
+                <a:latin typeface="Calibri"/>
+              </a:defRPr>
+            </a:pPr>
+            <a:r>
+              <a:t>Add more guidelines across diverse specialties</a:t>
+            </a:r>
+          </a:p>
+          <a:p>
+            <a:pPr>
+              <a:spcAft>
+                <a:spcPts val="600"/>
+              </a:spcAft>
+              <a:defRPr sz="1500">
+                <a:solidFill>
+                  <a:srgbClr val="1A1A1A"/>
+                </a:solidFill>
+                <a:latin typeface="Calibri"/>
+              </a:defRPr>
+            </a:pPr>
+            <a:r>
+              <a:t>Improve PMC table parsing</a:t>
+            </a:r>
+          </a:p>
+          <a:p>
+            <a:pPr>
+              <a:spcAft>
+                <a:spcPts val="600"/>
+              </a:spcAft>
+              <a:defRPr sz="1500">
+                <a:solidFill>
+                  <a:srgbClr val="1A1A1A"/>
+                </a:solidFill>
+                <a:latin typeface="Calibri"/>
+              </a:defRPr>
+            </a:pPr>
+            <a:r>
+              <a:t>Add author demographic analysis</a:t>
+            </a:r>
+          </a:p>
+          <a:p>
+            <a:pPr>
+              <a:spcAft>
+                <a:spcPts val="600"/>
+              </a:spcAft>
+              <a:defRPr sz="1500">
+                <a:solidFill>
+                  <a:srgbClr val="1A1A1A"/>
+                </a:solidFill>
+                <a:latin typeface="Calibri"/>
+              </a:defRPr>
+            </a:pPr>
+            <a:r>
+              <a:t>Deploy public API for research community</a:t>
+            </a:r>
+          </a:p>
+          <a:p>
+            <a:pPr>
+              <a:spcAft>
+                <a:spcPts val="600"/>
+              </a:spcAft>
+              <a:defRPr sz="1500">
+                <a:solidFill>
+                  <a:srgbClr val="1A1A1A"/>
+                </a:solidFill>
+                <a:latin typeface="Calibri"/>
+              </a:defRPr>
+            </a:pPr>
+            <a:r>
+              <a:t>Longitudinal analysis of reporting trends</a:t>
+            </a:r>
+          </a:p>
+        </p:txBody>
+      </p:sp>
+      <p:sp>
+        <p:nvSpPr>
+          <p:cNvPr id="9" name="TextBox 8"/>
+          <p:cNvSpPr txBox="1"/>
+          <p:nvPr/>
+        </p:nvSpPr>
+        <p:spPr>
+          <a:xfrm>
+            <a:off x="11155680" y="6400800"/>
+            <a:ext cx="914400" cy="365760"/>
+          </a:xfrm>
+          <a:prstGeom prst="rect">
+            <a:avLst/>
+          </a:prstGeom>
+          <a:noFill/>
+        </p:spPr>
+        <p:txBody>
+          <a:bodyPr wrap="square">
+            <a:spAutoFit/>
+          </a:bodyPr>
+          <a:lstStyle/>
+          <a:p>
+            <a:pPr algn="r">
+              <a:defRPr sz="1000" b="0">
+                <a:solidFill>
+                  <a:srgbClr val="808080"/>
+                </a:solidFill>
+                <a:latin typeface="Calibri"/>
+              </a:defRPr>
+            </a:pPr>
+            <a:r>
+              <a:t>14/15</a:t>
+            </a:r>
+          </a:p>
+        </p:txBody>
+      </p:sp>
+    </p:spTree>
+  </p:cSld>
+  <p:clrMapOvr>
+    <a:masterClrMapping/>
+  </p:clrMapOvr>
+</p:sld>
+</file>
+
+<file path=ppt/slides/slide15.xml><?xml version="1.0" encoding="utf-8"?>
 <p:sld xmlns:a="http://schemas.openxmlformats.org/drawingml/2006/main" xmlns:p="http://schemas.openxmlformats.org/presentationml/2006/main" xmlns:r="http://schemas.openxmlformats.org/officeDocument/2006/relationships">
   <p:cSld>
     <p:bg>
@@ -6717,7 +8206,7 @@
               </a:defRPr>
             </a:pPr>
             <a:r>
-              <a:t>MIT Critical Data —</a:t>
+              <a:t>MIT Critical Data</a:t>
             </a:r>
           </a:p>
         </p:txBody>
@@ -6753,7 +8242,7 @@
               </a:defRPr>
             </a:pPr>
             <a:r>
-              <a:t>14 / 14</a:t>
+              <a:t>15/15</a:t>
             </a:r>
           </a:p>
         </p:txBody>
@@ -6988,7 +8477,7 @@
               </a:defRPr>
             </a:pPr>
             <a:r>
-              <a:t>Goal: Automate the extraction of geographic and demographic representation metrics</a:t>
+              <a:t>Goal: Automate extraction of geographic and demographic representation metrics</a:t>
             </a:r>
           </a:p>
           <a:p>
@@ -7056,7 +8545,7 @@
               </a:defRPr>
             </a:pPr>
             <a:r>
-              <a:t>2 / 14</a:t>
+              <a:t>2/15</a:t>
             </a:r>
           </a:p>
         </p:txBody>
@@ -7931,7 +9420,7 @@
               </a:defRPr>
             </a:pPr>
             <a:r>
-              <a:t>3 / 14</a:t>
+              <a:t>3/15</a:t>
             </a:r>
           </a:p>
         </p:txBody>
@@ -8726,7 +10215,7 @@
               </a:defRPr>
             </a:pPr>
             <a:r>
-              <a:t>4 / 14</a:t>
+              <a:t>4/15</a:t>
             </a:r>
           </a:p>
         </p:txBody>
@@ -10012,7 +11501,7 @@
               </a:defRPr>
             </a:pPr>
             <a:r>
-              <a:t>5 / 14</a:t>
+              <a:t>5/15</a:t>
             </a:r>
           </a:p>
         </p:txBody>
@@ -10094,6 +11583,751 @@
         </p:nvSpPr>
         <p:spPr>
           <a:xfrm>
+            <a:off x="457200" y="274320"/>
+            <a:ext cx="10972800" cy="548640"/>
+          </a:xfrm>
+          <a:prstGeom prst="rect">
+            <a:avLst/>
+          </a:prstGeom>
+          <a:noFill/>
+        </p:spPr>
+        <p:txBody>
+          <a:bodyPr wrap="square">
+            <a:spAutoFit/>
+          </a:bodyPr>
+          <a:lstStyle/>
+          <a:p>
+            <a:pPr algn="l">
+              <a:defRPr sz="3600" b="1">
+                <a:solidFill>
+                  <a:srgbClr val="9B1B30"/>
+                </a:solidFill>
+                <a:latin typeface="Calibri"/>
+              </a:defRPr>
+            </a:pPr>
+            <a:r>
+              <a:t>Bias Score: What USABLE vs NOT USABLE Means</a:t>
+            </a:r>
+          </a:p>
+        </p:txBody>
+      </p:sp>
+      <p:sp>
+        <p:nvSpPr>
+          <p:cNvPr id="4" name="Rectangle 3"/>
+          <p:cNvSpPr/>
+          <p:nvPr/>
+        </p:nvSpPr>
+        <p:spPr>
+          <a:xfrm>
+            <a:off x="457200" y="868680"/>
+            <a:ext cx="2743200" cy="36576"/>
+          </a:xfrm>
+          <a:prstGeom prst="rect">
+            <a:avLst/>
+          </a:prstGeom>
+          <a:solidFill>
+            <a:srgbClr val="9B1B30"/>
+          </a:solidFill>
+          <a:ln>
+            <a:noFill/>
+          </a:ln>
+        </p:spPr>
+        <p:style>
+          <a:lnRef idx="1">
+            <a:schemeClr val="accent1"/>
+          </a:lnRef>
+          <a:fillRef idx="3">
+            <a:schemeClr val="accent1"/>
+          </a:fillRef>
+          <a:effectRef idx="2">
+            <a:schemeClr val="accent1"/>
+          </a:effectRef>
+          <a:fontRef idx="minor">
+            <a:schemeClr val="lt1"/>
+          </a:fontRef>
+        </p:style>
+        <p:txBody>
+          <a:bodyPr rtlCol="0" anchor="ctr"/>
+          <a:lstStyle/>
+          <a:p>
+            <a:pPr algn="ctr"/>
+          </a:p>
+        </p:txBody>
+      </p:sp>
+      <p:sp>
+        <p:nvSpPr>
+          <p:cNvPr id="5" name="TextBox 4"/>
+          <p:cNvSpPr txBox="1"/>
+          <p:nvPr/>
+        </p:nvSpPr>
+        <p:spPr>
+          <a:xfrm>
+            <a:off x="457200" y="1188720"/>
+            <a:ext cx="10972800" cy="457200"/>
+          </a:xfrm>
+          <a:prstGeom prst="rect">
+            <a:avLst/>
+          </a:prstGeom>
+          <a:noFill/>
+        </p:spPr>
+        <p:txBody>
+          <a:bodyPr wrap="square">
+            <a:spAutoFit/>
+          </a:bodyPr>
+          <a:lstStyle/>
+          <a:p>
+            <a:pPr algn="l">
+              <a:defRPr sz="1600" b="0">
+                <a:solidFill>
+                  <a:srgbClr val="5C5C5C"/>
+                </a:solidFill>
+                <a:latin typeface="Calibri"/>
+              </a:defRPr>
+            </a:pPr>
+            <a:r>
+              <a:t>The bias score (0–100%) measures how well a guideline’s cited studies report demographic data. Higher = more demographic data missing = less usable for diversity analysis.</a:t>
+            </a:r>
+          </a:p>
+        </p:txBody>
+      </p:sp>
+      <p:sp>
+        <p:nvSpPr>
+          <p:cNvPr id="6" name="Rectangle 5"/>
+          <p:cNvSpPr/>
+          <p:nvPr/>
+        </p:nvSpPr>
+        <p:spPr>
+          <a:xfrm>
+            <a:off x="640080" y="1828800"/>
+            <a:ext cx="3474720" cy="4114800"/>
+          </a:xfrm>
+          <a:prstGeom prst="rect">
+            <a:avLst/>
+          </a:prstGeom>
+          <a:solidFill>
+            <a:srgbClr val="D1FAE5"/>
+          </a:solidFill>
+          <a:ln>
+            <a:noFill/>
+          </a:ln>
+        </p:spPr>
+        <p:style>
+          <a:lnRef idx="1">
+            <a:schemeClr val="accent1"/>
+          </a:lnRef>
+          <a:fillRef idx="3">
+            <a:schemeClr val="accent1"/>
+          </a:fillRef>
+          <a:effectRef idx="2">
+            <a:schemeClr val="accent1"/>
+          </a:effectRef>
+          <a:fontRef idx="minor">
+            <a:schemeClr val="lt1"/>
+          </a:fontRef>
+        </p:style>
+        <p:txBody>
+          <a:bodyPr rtlCol="0" anchor="ctr"/>
+          <a:lstStyle/>
+          <a:p>
+            <a:pPr algn="ctr"/>
+          </a:p>
+        </p:txBody>
+      </p:sp>
+      <p:sp>
+        <p:nvSpPr>
+          <p:cNvPr id="7" name="TextBox 6"/>
+          <p:cNvSpPr txBox="1"/>
+          <p:nvPr/>
+        </p:nvSpPr>
+        <p:spPr>
+          <a:xfrm>
+            <a:off x="640080" y="2011680"/>
+            <a:ext cx="3474720" cy="457200"/>
+          </a:xfrm>
+          <a:prstGeom prst="rect">
+            <a:avLst/>
+          </a:prstGeom>
+          <a:noFill/>
+        </p:spPr>
+        <p:txBody>
+          <a:bodyPr wrap="square">
+            <a:spAutoFit/>
+          </a:bodyPr>
+          <a:lstStyle/>
+          <a:p>
+            <a:pPr algn="ctr">
+              <a:defRPr sz="2800" b="1">
+                <a:solidFill>
+                  <a:srgbClr val="065F46"/>
+                </a:solidFill>
+                <a:latin typeface="Calibri"/>
+              </a:defRPr>
+            </a:pPr>
+            <a:r>
+              <a:t>USABLE</a:t>
+            </a:r>
+          </a:p>
+        </p:txBody>
+      </p:sp>
+      <p:sp>
+        <p:nvSpPr>
+          <p:cNvPr id="8" name="TextBox 7"/>
+          <p:cNvSpPr txBox="1"/>
+          <p:nvPr/>
+        </p:nvSpPr>
+        <p:spPr>
+          <a:xfrm>
+            <a:off x="640080" y="2560320"/>
+            <a:ext cx="3474720" cy="365760"/>
+          </a:xfrm>
+          <a:prstGeom prst="rect">
+            <a:avLst/>
+          </a:prstGeom>
+          <a:noFill/>
+        </p:spPr>
+        <p:txBody>
+          <a:bodyPr wrap="square">
+            <a:spAutoFit/>
+          </a:bodyPr>
+          <a:lstStyle/>
+          <a:p>
+            <a:pPr algn="ctr">
+              <a:defRPr sz="1600" b="1">
+                <a:solidFill>
+                  <a:srgbClr val="065F46"/>
+                </a:solidFill>
+                <a:latin typeface="Calibri"/>
+              </a:defRPr>
+            </a:pPr>
+            <a:r>
+              <a:t>Score: 0–29%</a:t>
+            </a:r>
+          </a:p>
+        </p:txBody>
+      </p:sp>
+      <p:sp>
+        <p:nvSpPr>
+          <p:cNvPr id="9" name="TextBox 8"/>
+          <p:cNvSpPr txBox="1"/>
+          <p:nvPr/>
+        </p:nvSpPr>
+        <p:spPr>
+          <a:xfrm>
+            <a:off x="914400" y="3200400"/>
+            <a:ext cx="2926080" cy="2560320"/>
+          </a:xfrm>
+          <a:prstGeom prst="rect">
+            <a:avLst/>
+          </a:prstGeom>
+          <a:noFill/>
+        </p:spPr>
+        <p:txBody>
+          <a:bodyPr wrap="square">
+            <a:spAutoFit/>
+          </a:bodyPr>
+          <a:lstStyle/>
+          <a:p>
+            <a:pPr algn="ctr">
+              <a:defRPr sz="1400" b="0">
+                <a:solidFill>
+                  <a:srgbClr val="1A1A1A"/>
+                </a:solidFill>
+                <a:latin typeface="Calibri"/>
+              </a:defRPr>
+            </a:pPr>
+            <a:r>
+              <a:t>Adequate demographic reporting.</a:t>
+            </a:r>
+            <a:br/>
+            <a:r>
+              <a:t>Sex, race, and geographic data are</a:t>
+            </a:r>
+            <a:br/>
+            <a:r>
+              <a:t>sufficiently reported across studies.</a:t>
+            </a:r>
+            <a:br/>
+            <a:r>
+              <a:t>Proceed with diversity analysis.</a:t>
+            </a:r>
+          </a:p>
+        </p:txBody>
+      </p:sp>
+      <p:sp>
+        <p:nvSpPr>
+          <p:cNvPr id="10" name="Rectangle 9"/>
+          <p:cNvSpPr/>
+          <p:nvPr/>
+        </p:nvSpPr>
+        <p:spPr>
+          <a:xfrm>
+            <a:off x="4480560" y="1828800"/>
+            <a:ext cx="3474720" cy="4114800"/>
+          </a:xfrm>
+          <a:prstGeom prst="rect">
+            <a:avLst/>
+          </a:prstGeom>
+          <a:solidFill>
+            <a:srgbClr val="FEF3C7"/>
+          </a:solidFill>
+          <a:ln>
+            <a:noFill/>
+          </a:ln>
+        </p:spPr>
+        <p:style>
+          <a:lnRef idx="1">
+            <a:schemeClr val="accent1"/>
+          </a:lnRef>
+          <a:fillRef idx="3">
+            <a:schemeClr val="accent1"/>
+          </a:fillRef>
+          <a:effectRef idx="2">
+            <a:schemeClr val="accent1"/>
+          </a:effectRef>
+          <a:fontRef idx="minor">
+            <a:schemeClr val="lt1"/>
+          </a:fontRef>
+        </p:style>
+        <p:txBody>
+          <a:bodyPr rtlCol="0" anchor="ctr"/>
+          <a:lstStyle/>
+          <a:p>
+            <a:pPr algn="ctr"/>
+          </a:p>
+        </p:txBody>
+      </p:sp>
+      <p:sp>
+        <p:nvSpPr>
+          <p:cNvPr id="11" name="TextBox 10"/>
+          <p:cNvSpPr txBox="1"/>
+          <p:nvPr/>
+        </p:nvSpPr>
+        <p:spPr>
+          <a:xfrm>
+            <a:off x="4480560" y="2011680"/>
+            <a:ext cx="3474720" cy="457200"/>
+          </a:xfrm>
+          <a:prstGeom prst="rect">
+            <a:avLst/>
+          </a:prstGeom>
+          <a:noFill/>
+        </p:spPr>
+        <p:txBody>
+          <a:bodyPr wrap="square">
+            <a:spAutoFit/>
+          </a:bodyPr>
+          <a:lstStyle/>
+          <a:p>
+            <a:pPr algn="ctr">
+              <a:defRPr sz="2800" b="1">
+                <a:solidFill>
+                  <a:srgbClr val="92400E"/>
+                </a:solidFill>
+                <a:latin typeface="Calibri"/>
+              </a:defRPr>
+            </a:pPr>
+            <a:r>
+              <a:t>QUESTIONABLE</a:t>
+            </a:r>
+          </a:p>
+        </p:txBody>
+      </p:sp>
+      <p:sp>
+        <p:nvSpPr>
+          <p:cNvPr id="12" name="TextBox 11"/>
+          <p:cNvSpPr txBox="1"/>
+          <p:nvPr/>
+        </p:nvSpPr>
+        <p:spPr>
+          <a:xfrm>
+            <a:off x="4480560" y="2560320"/>
+            <a:ext cx="3474720" cy="365760"/>
+          </a:xfrm>
+          <a:prstGeom prst="rect">
+            <a:avLst/>
+          </a:prstGeom>
+          <a:noFill/>
+        </p:spPr>
+        <p:txBody>
+          <a:bodyPr wrap="square">
+            <a:spAutoFit/>
+          </a:bodyPr>
+          <a:lstStyle/>
+          <a:p>
+            <a:pPr algn="ctr">
+              <a:defRPr sz="1600" b="1">
+                <a:solidFill>
+                  <a:srgbClr val="92400E"/>
+                </a:solidFill>
+                <a:latin typeface="Calibri"/>
+              </a:defRPr>
+            </a:pPr>
+            <a:r>
+              <a:t>Score: 30–59%</a:t>
+            </a:r>
+          </a:p>
+        </p:txBody>
+      </p:sp>
+      <p:sp>
+        <p:nvSpPr>
+          <p:cNvPr id="13" name="TextBox 12"/>
+          <p:cNvSpPr txBox="1"/>
+          <p:nvPr/>
+        </p:nvSpPr>
+        <p:spPr>
+          <a:xfrm>
+            <a:off x="4754880" y="3200400"/>
+            <a:ext cx="2926080" cy="2560320"/>
+          </a:xfrm>
+          <a:prstGeom prst="rect">
+            <a:avLst/>
+          </a:prstGeom>
+          <a:noFill/>
+        </p:spPr>
+        <p:txBody>
+          <a:bodyPr wrap="square">
+            <a:spAutoFit/>
+          </a:bodyPr>
+          <a:lstStyle/>
+          <a:p>
+            <a:pPr algn="ctr">
+              <a:defRPr sz="1400" b="0">
+                <a:solidFill>
+                  <a:srgbClr val="1A1A1A"/>
+                </a:solidFill>
+                <a:latin typeface="Calibri"/>
+              </a:defRPr>
+            </a:pPr>
+            <a:r>
+              <a:t>Incomplete demographic reporting.</a:t>
+            </a:r>
+            <a:br/>
+            <a:r>
+              <a:t>Significant gaps in race, sex, or</a:t>
+            </a:r>
+            <a:br/>
+            <a:r>
+              <a:t>geographic data. Exercise caution</a:t>
+            </a:r>
+            <a:br/>
+            <a:r>
+              <a:t>when interpreting findings.</a:t>
+            </a:r>
+          </a:p>
+        </p:txBody>
+      </p:sp>
+      <p:sp>
+        <p:nvSpPr>
+          <p:cNvPr id="14" name="Rectangle 13"/>
+          <p:cNvSpPr/>
+          <p:nvPr/>
+        </p:nvSpPr>
+        <p:spPr>
+          <a:xfrm>
+            <a:off x="8321040" y="1828800"/>
+            <a:ext cx="3474720" cy="4114800"/>
+          </a:xfrm>
+          <a:prstGeom prst="rect">
+            <a:avLst/>
+          </a:prstGeom>
+          <a:solidFill>
+            <a:srgbClr val="FEE2E2"/>
+          </a:solidFill>
+          <a:ln>
+            <a:noFill/>
+          </a:ln>
+        </p:spPr>
+        <p:style>
+          <a:lnRef idx="1">
+            <a:schemeClr val="accent1"/>
+          </a:lnRef>
+          <a:fillRef idx="3">
+            <a:schemeClr val="accent1"/>
+          </a:fillRef>
+          <a:effectRef idx="2">
+            <a:schemeClr val="accent1"/>
+          </a:effectRef>
+          <a:fontRef idx="minor">
+            <a:schemeClr val="lt1"/>
+          </a:fontRef>
+        </p:style>
+        <p:txBody>
+          <a:bodyPr rtlCol="0" anchor="ctr"/>
+          <a:lstStyle/>
+          <a:p>
+            <a:pPr algn="ctr"/>
+          </a:p>
+        </p:txBody>
+      </p:sp>
+      <p:sp>
+        <p:nvSpPr>
+          <p:cNvPr id="15" name="TextBox 14"/>
+          <p:cNvSpPr txBox="1"/>
+          <p:nvPr/>
+        </p:nvSpPr>
+        <p:spPr>
+          <a:xfrm>
+            <a:off x="8321040" y="2011680"/>
+            <a:ext cx="3474720" cy="457200"/>
+          </a:xfrm>
+          <a:prstGeom prst="rect">
+            <a:avLst/>
+          </a:prstGeom>
+          <a:noFill/>
+        </p:spPr>
+        <p:txBody>
+          <a:bodyPr wrap="square">
+            <a:spAutoFit/>
+          </a:bodyPr>
+          <a:lstStyle/>
+          <a:p>
+            <a:pPr algn="ctr">
+              <a:defRPr sz="2800" b="1">
+                <a:solidFill>
+                  <a:srgbClr val="991B1B"/>
+                </a:solidFill>
+                <a:latin typeface="Calibri"/>
+              </a:defRPr>
+            </a:pPr>
+            <a:r>
+              <a:t>NOT USABLE</a:t>
+            </a:r>
+          </a:p>
+        </p:txBody>
+      </p:sp>
+      <p:sp>
+        <p:nvSpPr>
+          <p:cNvPr id="16" name="TextBox 15"/>
+          <p:cNvSpPr txBox="1"/>
+          <p:nvPr/>
+        </p:nvSpPr>
+        <p:spPr>
+          <a:xfrm>
+            <a:off x="8321040" y="2560320"/>
+            <a:ext cx="3474720" cy="365760"/>
+          </a:xfrm>
+          <a:prstGeom prst="rect">
+            <a:avLst/>
+          </a:prstGeom>
+          <a:noFill/>
+        </p:spPr>
+        <p:txBody>
+          <a:bodyPr wrap="square">
+            <a:spAutoFit/>
+          </a:bodyPr>
+          <a:lstStyle/>
+          <a:p>
+            <a:pPr algn="ctr">
+              <a:defRPr sz="1600" b="1">
+                <a:solidFill>
+                  <a:srgbClr val="991B1B"/>
+                </a:solidFill>
+                <a:latin typeface="Calibri"/>
+              </a:defRPr>
+            </a:pPr>
+            <a:r>
+              <a:t>Score: 60–100%</a:t>
+            </a:r>
+          </a:p>
+        </p:txBody>
+      </p:sp>
+      <p:sp>
+        <p:nvSpPr>
+          <p:cNvPr id="17" name="TextBox 16"/>
+          <p:cNvSpPr txBox="1"/>
+          <p:nvPr/>
+        </p:nvSpPr>
+        <p:spPr>
+          <a:xfrm>
+            <a:off x="8595360" y="3200400"/>
+            <a:ext cx="2926080" cy="2560320"/>
+          </a:xfrm>
+          <a:prstGeom prst="rect">
+            <a:avLst/>
+          </a:prstGeom>
+          <a:noFill/>
+        </p:spPr>
+        <p:txBody>
+          <a:bodyPr wrap="square">
+            <a:spAutoFit/>
+          </a:bodyPr>
+          <a:lstStyle/>
+          <a:p>
+            <a:pPr algn="ctr">
+              <a:defRPr sz="1400" b="0">
+                <a:solidFill>
+                  <a:srgbClr val="1A1A1A"/>
+                </a:solidFill>
+                <a:latin typeface="Calibri"/>
+              </a:defRPr>
+            </a:pPr>
+            <a:r>
+              <a:t>Inadequate demographic reporting.</a:t>
+            </a:r>
+            <a:br/>
+            <a:r>
+              <a:t>Critical data missing. Cannot reliably</a:t>
+            </a:r>
+            <a:br/>
+            <a:r>
+              <a:t>assess diversity. Do not use for</a:t>
+            </a:r>
+            <a:br/>
+            <a:r>
+              <a:t>diversity metrics.</a:t>
+            </a:r>
+          </a:p>
+        </p:txBody>
+      </p:sp>
+      <p:sp>
+        <p:nvSpPr>
+          <p:cNvPr id="18" name="TextBox 17"/>
+          <p:cNvSpPr txBox="1"/>
+          <p:nvPr/>
+        </p:nvSpPr>
+        <p:spPr>
+          <a:xfrm>
+            <a:off x="457200" y="6126480"/>
+            <a:ext cx="10972800" cy="457200"/>
+          </a:xfrm>
+          <a:prstGeom prst="rect">
+            <a:avLst/>
+          </a:prstGeom>
+          <a:noFill/>
+        </p:spPr>
+        <p:txBody>
+          <a:bodyPr wrap="square">
+            <a:spAutoFit/>
+          </a:bodyPr>
+          <a:lstStyle/>
+          <a:p>
+            <a:pPr algn="l">
+              <a:defRPr sz="1300" b="0">
+                <a:solidFill>
+                  <a:srgbClr val="5C5C5C"/>
+                </a:solidFill>
+                <a:latin typeface="Calibri"/>
+              </a:defRPr>
+            </a:pPr>
+            <a:r>
+              <a:t>Scoring: Age missing (25%) + Sex missing (25%) + Race missing (30%) + Country missing (15%) + Geographic bias (5%)</a:t>
+            </a:r>
+          </a:p>
+        </p:txBody>
+      </p:sp>
+      <p:sp>
+        <p:nvSpPr>
+          <p:cNvPr id="19" name="TextBox 18"/>
+          <p:cNvSpPr txBox="1"/>
+          <p:nvPr/>
+        </p:nvSpPr>
+        <p:spPr>
+          <a:xfrm>
+            <a:off x="11155680" y="6400800"/>
+            <a:ext cx="914400" cy="365760"/>
+          </a:xfrm>
+          <a:prstGeom prst="rect">
+            <a:avLst/>
+          </a:prstGeom>
+          <a:noFill/>
+        </p:spPr>
+        <p:txBody>
+          <a:bodyPr wrap="square">
+            <a:spAutoFit/>
+          </a:bodyPr>
+          <a:lstStyle/>
+          <a:p>
+            <a:pPr algn="r">
+              <a:defRPr sz="1000" b="0">
+                <a:solidFill>
+                  <a:srgbClr val="808080"/>
+                </a:solidFill>
+                <a:latin typeface="Calibri"/>
+              </a:defRPr>
+            </a:pPr>
+            <a:r>
+              <a:t>6/15</a:t>
+            </a:r>
+          </a:p>
+        </p:txBody>
+      </p:sp>
+    </p:spTree>
+  </p:cSld>
+  <p:clrMapOvr>
+    <a:masterClrMapping/>
+  </p:clrMapOvr>
+</p:sld>
+</file>
+
+<file path=ppt/slides/slide7.xml><?xml version="1.0" encoding="utf-8"?>
+<p:sld xmlns:a="http://schemas.openxmlformats.org/drawingml/2006/main" xmlns:p="http://schemas.openxmlformats.org/presentationml/2006/main" xmlns:r="http://schemas.openxmlformats.org/officeDocument/2006/relationships">
+  <p:cSld>
+    <p:bg>
+      <p:bgPr>
+        <a:solidFill>
+          <a:srgbClr val="FFFFFF"/>
+        </a:solidFill>
+        <a:effectLst/>
+      </p:bgPr>
+    </p:bg>
+    <p:spTree>
+      <p:nvGrpSpPr>
+        <p:cNvPr id="1" name=""/>
+        <p:cNvGrpSpPr/>
+        <p:nvPr/>
+      </p:nvGrpSpPr>
+      <p:grpSpPr/>
+      <p:sp>
+        <p:nvSpPr>
+          <p:cNvPr id="2" name="Rectangle 1"/>
+          <p:cNvSpPr/>
+          <p:nvPr/>
+        </p:nvSpPr>
+        <p:spPr>
+          <a:xfrm>
+            <a:off x="0" y="0"/>
+            <a:ext cx="73152" cy="6858000"/>
+          </a:xfrm>
+          <a:prstGeom prst="rect">
+            <a:avLst/>
+          </a:prstGeom>
+          <a:solidFill>
+            <a:srgbClr val="9B1B30"/>
+          </a:solidFill>
+          <a:ln>
+            <a:noFill/>
+          </a:ln>
+        </p:spPr>
+        <p:style>
+          <a:lnRef idx="1">
+            <a:schemeClr val="accent1"/>
+          </a:lnRef>
+          <a:fillRef idx="3">
+            <a:schemeClr val="accent1"/>
+          </a:fillRef>
+          <a:effectRef idx="2">
+            <a:schemeClr val="accent1"/>
+          </a:effectRef>
+          <a:fontRef idx="minor">
+            <a:schemeClr val="lt1"/>
+          </a:fontRef>
+        </p:style>
+        <p:txBody>
+          <a:bodyPr rtlCol="0" anchor="ctr"/>
+          <a:lstStyle/>
+          <a:p>
+            <a:pPr algn="ctr"/>
+          </a:p>
+        </p:txBody>
+      </p:sp>
+      <p:sp>
+        <p:nvSpPr>
+          <p:cNvPr id="3" name="TextBox 2"/>
+          <p:cNvSpPr txBox="1"/>
+          <p:nvPr/>
+        </p:nvSpPr>
+        <p:spPr>
+          <a:xfrm>
             <a:off x="457200" y="182880"/>
             <a:ext cx="10972800" cy="457200"/>
           </a:xfrm>
@@ -10556,7 +12790,7 @@
               </a:defRPr>
             </a:pPr>
             <a:r>
-              <a:t>Bias Score</a:t>
+              <a:t>Bias</a:t>
             </a:r>
           </a:p>
         </p:txBody>
@@ -10776,7 +13010,7 @@
                     <a:bodyPr/>
                     <a:lstStyle/>
                     <a:p>
-                      <a:pPr algn="l">
+                      <a:pPr>
                         <a:defRPr sz="1200">
                           <a:solidFill>
                             <a:srgbClr val="1A1A1A"/>
@@ -10795,7 +13029,7 @@
                     <a:bodyPr/>
                     <a:lstStyle/>
                     <a:p>
-                      <a:pPr algn="ctr">
+                      <a:pPr>
                         <a:defRPr sz="1200">
                           <a:solidFill>
                             <a:srgbClr val="1A1A1A"/>
@@ -10814,7 +13048,7 @@
                     <a:bodyPr/>
                     <a:lstStyle/>
                     <a:p>
-                      <a:pPr algn="ctr">
+                      <a:pPr>
                         <a:defRPr sz="1200">
                           <a:solidFill>
                             <a:srgbClr val="1A1A1A"/>
@@ -10835,7 +13069,7 @@
                     <a:bodyPr/>
                     <a:lstStyle/>
                     <a:p>
-                      <a:pPr algn="l">
+                      <a:pPr>
                         <a:defRPr sz="1200">
                           <a:solidFill>
                             <a:srgbClr val="1A1A1A"/>
@@ -10854,7 +13088,7 @@
                     <a:bodyPr/>
                     <a:lstStyle/>
                     <a:p>
-                      <a:pPr algn="ctr">
+                      <a:pPr>
                         <a:defRPr sz="1200">
                           <a:solidFill>
                             <a:srgbClr val="1A1A1A"/>
@@ -10873,7 +13107,7 @@
                     <a:bodyPr/>
                     <a:lstStyle/>
                     <a:p>
-                      <a:pPr algn="ctr">
+                      <a:pPr>
                         <a:defRPr sz="1200">
                           <a:solidFill>
                             <a:srgbClr val="1A1A1A"/>
@@ -10894,7 +13128,7 @@
                     <a:bodyPr/>
                     <a:lstStyle/>
                     <a:p>
-                      <a:pPr algn="l">
+                      <a:pPr>
                         <a:defRPr sz="1200">
                           <a:solidFill>
                             <a:srgbClr val="1A1A1A"/>
@@ -10913,7 +13147,7 @@
                     <a:bodyPr/>
                     <a:lstStyle/>
                     <a:p>
-                      <a:pPr algn="ctr">
+                      <a:pPr>
                         <a:defRPr sz="1200">
                           <a:solidFill>
                             <a:srgbClr val="1A1A1A"/>
@@ -10932,7 +13166,7 @@
                     <a:bodyPr/>
                     <a:lstStyle/>
                     <a:p>
-                      <a:pPr algn="ctr">
+                      <a:pPr>
                         <a:defRPr sz="1200">
                           <a:solidFill>
                             <a:srgbClr val="1A1A1A"/>
@@ -11613,42 +13847,6 @@
         </p:nvSpPr>
         <p:spPr>
           <a:xfrm>
-            <a:off x="457200" y="4937760"/>
-            <a:ext cx="10972800" cy="1645920"/>
-          </a:xfrm>
-          <a:prstGeom prst="rect">
-            <a:avLst/>
-          </a:prstGeom>
-          <a:noFill/>
-        </p:spPr>
-        <p:txBody>
-          <a:bodyPr wrap="square">
-            <a:spAutoFit/>
-          </a:bodyPr>
-          <a:lstStyle/>
-          <a:p>
-            <a:pPr algn="l">
-              <a:defRPr sz="1100" b="0">
-                <a:solidFill>
-                  <a:srgbClr val="5C5C5C"/>
-                </a:solidFill>
-                <a:latin typeface="Calibri"/>
-              </a:defRPr>
-            </a:pPr>
-            <a:r>
-              <a:t>CLINICAL BIAS ASSESSMENT REPORT</a:t>
-            </a:r>
-          </a:p>
-        </p:txBody>
-      </p:sp>
-      <p:sp>
-        <p:nvSpPr>
-          <p:cNvPr id="38" name="TextBox 37"/>
-          <p:cNvSpPr txBox="1"/>
-          <p:nvPr/>
-        </p:nvSpPr>
-        <p:spPr>
-          <a:xfrm>
             <a:off x="11155680" y="6400800"/>
             <a:ext cx="914400" cy="365760"/>
           </a:xfrm>
@@ -11672,7 +13870,7 @@
               </a:defRPr>
             </a:pPr>
             <a:r>
-              <a:t>6 / 14</a:t>
+              <a:t>7/15</a:t>
             </a:r>
           </a:p>
         </p:txBody>
@@ -11685,7 +13883,7 @@
 </p:sld>
 </file>
 
-<file path=ppt/slides/slide7.xml><?xml version="1.0" encoding="utf-8"?>
+<file path=ppt/slides/slide8.xml><?xml version="1.0" encoding="utf-8"?>
 <p:sld xmlns:a="http://schemas.openxmlformats.org/drawingml/2006/main" xmlns:p="http://schemas.openxmlformats.org/presentationml/2006/main" xmlns:r="http://schemas.openxmlformats.org/officeDocument/2006/relationships">
   <p:cSld>
     <p:bg>
@@ -12216,7 +14414,7 @@
               </a:defRPr>
             </a:pPr>
             <a:r>
-              <a:t>Bias Score</a:t>
+              <a:t>Bias</a:t>
             </a:r>
           </a:p>
         </p:txBody>
@@ -12436,7 +14634,7 @@
                     <a:bodyPr/>
                     <a:lstStyle/>
                     <a:p>
-                      <a:pPr algn="l">
+                      <a:pPr>
                         <a:defRPr sz="1200">
                           <a:solidFill>
                             <a:srgbClr val="1A1A1A"/>
@@ -12455,7 +14653,7 @@
                     <a:bodyPr/>
                     <a:lstStyle/>
                     <a:p>
-                      <a:pPr algn="ctr">
+                      <a:pPr>
                         <a:defRPr sz="1200">
                           <a:solidFill>
                             <a:srgbClr val="1A1A1A"/>
@@ -12474,7 +14672,7 @@
                     <a:bodyPr/>
                     <a:lstStyle/>
                     <a:p>
-                      <a:pPr algn="ctr">
+                      <a:pPr>
                         <a:defRPr sz="1200">
                           <a:solidFill>
                             <a:srgbClr val="1A1A1A"/>
@@ -12495,7 +14693,7 @@
                     <a:bodyPr/>
                     <a:lstStyle/>
                     <a:p>
-                      <a:pPr algn="l">
+                      <a:pPr>
                         <a:defRPr sz="1200">
                           <a:solidFill>
                             <a:srgbClr val="1A1A1A"/>
@@ -12514,7 +14712,7 @@
                     <a:bodyPr/>
                     <a:lstStyle/>
                     <a:p>
-                      <a:pPr algn="ctr">
+                      <a:pPr>
                         <a:defRPr sz="1200">
                           <a:solidFill>
                             <a:srgbClr val="1A1A1A"/>
@@ -12533,7 +14731,7 @@
                     <a:bodyPr/>
                     <a:lstStyle/>
                     <a:p>
-                      <a:pPr algn="ctr">
+                      <a:pPr>
                         <a:defRPr sz="1200">
                           <a:solidFill>
                             <a:srgbClr val="1A1A1A"/>
@@ -12554,7 +14752,7 @@
                     <a:bodyPr/>
                     <a:lstStyle/>
                     <a:p>
-                      <a:pPr algn="l">
+                      <a:pPr>
                         <a:defRPr sz="1200">
                           <a:solidFill>
                             <a:srgbClr val="1A1A1A"/>
@@ -12573,7 +14771,7 @@
                     <a:bodyPr/>
                     <a:lstStyle/>
                     <a:p>
-                      <a:pPr algn="ctr">
+                      <a:pPr>
                         <a:defRPr sz="1200">
                           <a:solidFill>
                             <a:srgbClr val="1A1A1A"/>
@@ -12592,7 +14790,7 @@
                     <a:bodyPr/>
                     <a:lstStyle/>
                     <a:p>
-                      <a:pPr algn="ctr">
+                      <a:pPr>
                         <a:defRPr sz="1200">
                           <a:solidFill>
                             <a:srgbClr val="1A1A1A"/>
@@ -13273,39 +15471,6 @@
         </p:nvSpPr>
         <p:spPr>
           <a:xfrm>
-            <a:off x="457200" y="4937760"/>
-            <a:ext cx="10972800" cy="1645920"/>
-          </a:xfrm>
-          <a:prstGeom prst="rect">
-            <a:avLst/>
-          </a:prstGeom>
-          <a:noFill/>
-        </p:spPr>
-        <p:txBody>
-          <a:bodyPr wrap="square">
-            <a:spAutoFit/>
-          </a:bodyPr>
-          <a:lstStyle/>
-          <a:p>
-            <a:pPr algn="l">
-              <a:defRPr sz="1100" b="0">
-                <a:solidFill>
-                  <a:srgbClr val="5C5C5C"/>
-                </a:solidFill>
-                <a:latin typeface="Calibri"/>
-              </a:defRPr>
-            </a:pPr>
-          </a:p>
-        </p:txBody>
-      </p:sp>
-      <p:sp>
-        <p:nvSpPr>
-          <p:cNvPr id="38" name="TextBox 37"/>
-          <p:cNvSpPr txBox="1"/>
-          <p:nvPr/>
-        </p:nvSpPr>
-        <p:spPr>
-          <a:xfrm>
             <a:off x="11155680" y="6400800"/>
             <a:ext cx="914400" cy="365760"/>
           </a:xfrm>
@@ -13329,7 +15494,7 @@
               </a:defRPr>
             </a:pPr>
             <a:r>
-              <a:t>7 / 14</a:t>
+              <a:t>8/15</a:t>
             </a:r>
           </a:p>
         </p:txBody>
@@ -13342,7 +15507,7 @@
 </p:sld>
 </file>
 
-<file path=ppt/slides/slide8.xml><?xml version="1.0" encoding="utf-8"?>
+<file path=ppt/slides/slide9.xml><?xml version="1.0" encoding="utf-8"?>
 <p:sld xmlns:a="http://schemas.openxmlformats.org/drawingml/2006/main" xmlns:p="http://schemas.openxmlformats.org/presentationml/2006/main" xmlns:r="http://schemas.openxmlformats.org/officeDocument/2006/relationships">
   <p:cSld>
     <p:bg>
@@ -13873,7 +16038,7 @@
               </a:defRPr>
             </a:pPr>
             <a:r>
-              <a:t>Bias Score</a:t>
+              <a:t>Bias</a:t>
             </a:r>
           </a:p>
         </p:txBody>
@@ -14093,7 +16258,7 @@
                     <a:bodyPr/>
                     <a:lstStyle/>
                     <a:p>
-                      <a:pPr algn="l">
+                      <a:pPr>
                         <a:defRPr sz="1200">
                           <a:solidFill>
                             <a:srgbClr val="1A1A1A"/>
@@ -14112,7 +16277,7 @@
                     <a:bodyPr/>
                     <a:lstStyle/>
                     <a:p>
-                      <a:pPr algn="ctr">
+                      <a:pPr>
                         <a:defRPr sz="1200">
                           <a:solidFill>
                             <a:srgbClr val="1A1A1A"/>
@@ -14131,7 +16296,7 @@
                     <a:bodyPr/>
                     <a:lstStyle/>
                     <a:p>
-                      <a:pPr algn="ctr">
+                      <a:pPr>
                         <a:defRPr sz="1200">
                           <a:solidFill>
                             <a:srgbClr val="1A1A1A"/>
@@ -14152,7 +16317,7 @@
                     <a:bodyPr/>
                     <a:lstStyle/>
                     <a:p>
-                      <a:pPr algn="l">
+                      <a:pPr>
                         <a:defRPr sz="1200">
                           <a:solidFill>
                             <a:srgbClr val="1A1A1A"/>
@@ -14171,7 +16336,7 @@
                     <a:bodyPr/>
                     <a:lstStyle/>
                     <a:p>
-                      <a:pPr algn="ctr">
+                      <a:pPr>
                         <a:defRPr sz="1200">
                           <a:solidFill>
                             <a:srgbClr val="1A1A1A"/>
@@ -14190,7 +16355,7 @@
                     <a:bodyPr/>
                     <a:lstStyle/>
                     <a:p>
-                      <a:pPr algn="ctr">
+                      <a:pPr>
                         <a:defRPr sz="1200">
                           <a:solidFill>
                             <a:srgbClr val="1A1A1A"/>
@@ -14211,7 +16376,7 @@
                     <a:bodyPr/>
                     <a:lstStyle/>
                     <a:p>
-                      <a:pPr algn="l">
+                      <a:pPr>
                         <a:defRPr sz="1200">
                           <a:solidFill>
                             <a:srgbClr val="1A1A1A"/>
@@ -14230,7 +16395,7 @@
                     <a:bodyPr/>
                     <a:lstStyle/>
                     <a:p>
-                      <a:pPr algn="ctr">
+                      <a:pPr>
                         <a:defRPr sz="1200">
                           <a:solidFill>
                             <a:srgbClr val="1A1A1A"/>
@@ -14249,7 +16414,7 @@
                     <a:bodyPr/>
                     <a:lstStyle/>
                     <a:p>
-                      <a:pPr algn="ctr">
+                      <a:pPr>
                         <a:defRPr sz="1200">
                           <a:solidFill>
                             <a:srgbClr val="1A1A1A"/>
@@ -14276,42 +16441,6 @@
         </p:nvSpPr>
         <p:spPr>
           <a:xfrm>
-            <a:off x="457200" y="4937760"/>
-            <a:ext cx="10972800" cy="1645920"/>
-          </a:xfrm>
-          <a:prstGeom prst="rect">
-            <a:avLst/>
-          </a:prstGeom>
-          <a:noFill/>
-        </p:spPr>
-        <p:txBody>
-          <a:bodyPr wrap="square">
-            <a:spAutoFit/>
-          </a:bodyPr>
-          <a:lstStyle/>
-          <a:p>
-            <a:pPr algn="l">
-              <a:defRPr sz="1100" b="0">
-                <a:solidFill>
-                  <a:srgbClr val="5C5C5C"/>
-                </a:solidFill>
-                <a:latin typeface="Calibri"/>
-              </a:defRPr>
-            </a:pPr>
-            <a:r>
-              <a:t>CLINICAL BIAS ASSESSMENT REPORT</a:t>
-            </a:r>
-          </a:p>
-        </p:txBody>
-      </p:sp>
-      <p:sp>
-        <p:nvSpPr>
-          <p:cNvPr id="21" name="TextBox 20"/>
-          <p:cNvSpPr txBox="1"/>
-          <p:nvPr/>
-        </p:nvSpPr>
-        <p:spPr>
-          <a:xfrm>
             <a:off x="11155680" y="6400800"/>
             <a:ext cx="914400" cy="365760"/>
           </a:xfrm>
@@ -14335,1552 +16464,7 @@
               </a:defRPr>
             </a:pPr>
             <a:r>
-              <a:t>8 / 14</a:t>
-            </a:r>
-          </a:p>
-        </p:txBody>
-      </p:sp>
-    </p:spTree>
-  </p:cSld>
-  <p:clrMapOvr>
-    <a:masterClrMapping/>
-  </p:clrMapOvr>
-</p:sld>
-</file>
-
-<file path=ppt/slides/slide9.xml><?xml version="1.0" encoding="utf-8"?>
-<p:sld xmlns:a="http://schemas.openxmlformats.org/drawingml/2006/main" xmlns:p="http://schemas.openxmlformats.org/presentationml/2006/main" xmlns:r="http://schemas.openxmlformats.org/officeDocument/2006/relationships">
-  <p:cSld>
-    <p:bg>
-      <p:bgPr>
-        <a:solidFill>
-          <a:srgbClr val="FFFFFF"/>
-        </a:solidFill>
-        <a:effectLst/>
-      </p:bgPr>
-    </p:bg>
-    <p:spTree>
-      <p:nvGrpSpPr>
-        <p:cNvPr id="1" name=""/>
-        <p:cNvGrpSpPr/>
-        <p:nvPr/>
-      </p:nvGrpSpPr>
-      <p:grpSpPr/>
-      <p:sp>
-        <p:nvSpPr>
-          <p:cNvPr id="2" name="Rectangle 1"/>
-          <p:cNvSpPr/>
-          <p:nvPr/>
-        </p:nvSpPr>
-        <p:spPr>
-          <a:xfrm>
-            <a:off x="0" y="0"/>
-            <a:ext cx="73152" cy="6858000"/>
-          </a:xfrm>
-          <a:prstGeom prst="rect">
-            <a:avLst/>
-          </a:prstGeom>
-          <a:solidFill>
-            <a:srgbClr val="9B1B30"/>
-          </a:solidFill>
-          <a:ln>
-            <a:noFill/>
-          </a:ln>
-        </p:spPr>
-        <p:style>
-          <a:lnRef idx="1">
-            <a:schemeClr val="accent1"/>
-          </a:lnRef>
-          <a:fillRef idx="3">
-            <a:schemeClr val="accent1"/>
-          </a:fillRef>
-          <a:effectRef idx="2">
-            <a:schemeClr val="accent1"/>
-          </a:effectRef>
-          <a:fontRef idx="minor">
-            <a:schemeClr val="lt1"/>
-          </a:fontRef>
-        </p:style>
-        <p:txBody>
-          <a:bodyPr rtlCol="0" anchor="ctr"/>
-          <a:lstStyle/>
-          <a:p>
-            <a:pPr algn="ctr"/>
-          </a:p>
-        </p:txBody>
-      </p:sp>
-      <p:sp>
-        <p:nvSpPr>
-          <p:cNvPr id="3" name="TextBox 2"/>
-          <p:cNvSpPr txBox="1"/>
-          <p:nvPr/>
-        </p:nvSpPr>
-        <p:spPr>
-          <a:xfrm>
-            <a:off x="457200" y="182880"/>
-            <a:ext cx="10972800" cy="457200"/>
-          </a:xfrm>
-          <a:prstGeom prst="rect">
-            <a:avLst/>
-          </a:prstGeom>
-          <a:noFill/>
-        </p:spPr>
-        <p:txBody>
-          <a:bodyPr wrap="square">
-            <a:spAutoFit/>
-          </a:bodyPr>
-          <a:lstStyle/>
-          <a:p>
-            <a:pPr algn="l">
-              <a:defRPr sz="3200" b="1">
-                <a:solidFill>
-                  <a:srgbClr val="9B1B30"/>
-                </a:solidFill>
-                <a:latin typeface="Calibri"/>
-              </a:defRPr>
-            </a:pPr>
-            <a:r>
-              <a:t>Results: AACE Osteoporosis 2020</a:t>
-            </a:r>
-          </a:p>
-        </p:txBody>
-      </p:sp>
-      <p:sp>
-        <p:nvSpPr>
-          <p:cNvPr id="4" name="TextBox 3"/>
-          <p:cNvSpPr txBox="1"/>
-          <p:nvPr/>
-        </p:nvSpPr>
-        <p:spPr>
-          <a:xfrm>
-            <a:off x="457200" y="640080"/>
-            <a:ext cx="10972800" cy="365760"/>
-          </a:xfrm>
-          <a:prstGeom prst="rect">
-            <a:avLst/>
-          </a:prstGeom>
-          <a:noFill/>
-        </p:spPr>
-        <p:txBody>
-          <a:bodyPr wrap="square">
-            <a:spAutoFit/>
-          </a:bodyPr>
-          <a:lstStyle/>
-          <a:p>
-            <a:pPr algn="l">
-              <a:defRPr sz="1400" b="0">
-                <a:solidFill>
-                  <a:srgbClr val="5C5C5C"/>
-                </a:solidFill>
-                <a:latin typeface="Calibri"/>
-              </a:defRPr>
-            </a:pPr>
-            <a:r>
-              <a:t>American Association of Clinical Endocrinologists/American College of Endocrinology Clinical Practic</a:t>
-            </a:r>
-          </a:p>
-        </p:txBody>
-      </p:sp>
-      <p:sp>
-        <p:nvSpPr>
-          <p:cNvPr id="5" name="Rectangle 4"/>
-          <p:cNvSpPr/>
-          <p:nvPr/>
-        </p:nvSpPr>
-        <p:spPr>
-          <a:xfrm>
-            <a:off x="10058400" y="548640"/>
-            <a:ext cx="1828800" cy="457200"/>
-          </a:xfrm>
-          <a:prstGeom prst="rect">
-            <a:avLst/>
-          </a:prstGeom>
-          <a:solidFill>
-            <a:srgbClr val="991B1B"/>
-          </a:solidFill>
-          <a:ln>
-            <a:noFill/>
-          </a:ln>
-        </p:spPr>
-        <p:style>
-          <a:lnRef idx="1">
-            <a:schemeClr val="accent1"/>
-          </a:lnRef>
-          <a:fillRef idx="3">
-            <a:schemeClr val="accent1"/>
-          </a:fillRef>
-          <a:effectRef idx="2">
-            <a:schemeClr val="accent1"/>
-          </a:effectRef>
-          <a:fontRef idx="minor">
-            <a:schemeClr val="lt1"/>
-          </a:fontRef>
-        </p:style>
-        <p:txBody>
-          <a:bodyPr rtlCol="0" anchor="ctr"/>
-          <a:lstStyle/>
-          <a:p>
-            <a:pPr algn="ctr"/>
-          </a:p>
-        </p:txBody>
-      </p:sp>
-      <p:sp>
-        <p:nvSpPr>
-          <p:cNvPr id="6" name="TextBox 5"/>
-          <p:cNvSpPr txBox="1"/>
-          <p:nvPr/>
-        </p:nvSpPr>
-        <p:spPr>
-          <a:xfrm>
-            <a:off x="10058400" y="548640"/>
-            <a:ext cx="1828800" cy="457200"/>
-          </a:xfrm>
-          <a:prstGeom prst="rect">
-            <a:avLst/>
-          </a:prstGeom>
-          <a:noFill/>
-        </p:spPr>
-        <p:txBody>
-          <a:bodyPr wrap="square">
-            <a:spAutoFit/>
-          </a:bodyPr>
-          <a:lstStyle/>
-          <a:p>
-            <a:pPr algn="ctr">
-              <a:defRPr sz="1400" b="1">
-                <a:solidFill>
-                  <a:srgbClr val="FFFFFF"/>
-                </a:solidFill>
-                <a:latin typeface="Calibri"/>
-              </a:defRPr>
-            </a:pPr>
-            <a:r>
-              <a:t>NOT USABLE</a:t>
-            </a:r>
-          </a:p>
-        </p:txBody>
-      </p:sp>
-      <p:sp>
-        <p:nvSpPr>
-          <p:cNvPr id="7" name="TextBox 6"/>
-          <p:cNvSpPr txBox="1"/>
-          <p:nvPr/>
-        </p:nvSpPr>
-        <p:spPr>
-          <a:xfrm>
-            <a:off x="457200" y="1188720"/>
-            <a:ext cx="1828800" cy="365760"/>
-          </a:xfrm>
-          <a:prstGeom prst="rect">
-            <a:avLst/>
-          </a:prstGeom>
-          <a:noFill/>
-        </p:spPr>
-        <p:txBody>
-          <a:bodyPr wrap="square">
-            <a:spAutoFit/>
-          </a:bodyPr>
-          <a:lstStyle/>
-          <a:p>
-            <a:pPr algn="l">
-              <a:defRPr sz="1200" b="0">
-                <a:solidFill>
-                  <a:srgbClr val="5C5C5C"/>
-                </a:solidFill>
-                <a:latin typeface="Calibri"/>
-              </a:defRPr>
-            </a:pPr>
-            <a:r>
-              <a:t>Screened</a:t>
-            </a:r>
-          </a:p>
-        </p:txBody>
-      </p:sp>
-      <p:sp>
-        <p:nvSpPr>
-          <p:cNvPr id="8" name="TextBox 7"/>
-          <p:cNvSpPr txBox="1"/>
-          <p:nvPr/>
-        </p:nvSpPr>
-        <p:spPr>
-          <a:xfrm>
-            <a:off x="457200" y="1463040"/>
-            <a:ext cx="1828800" cy="548640"/>
-          </a:xfrm>
-          <a:prstGeom prst="rect">
-            <a:avLst/>
-          </a:prstGeom>
-          <a:noFill/>
-        </p:spPr>
-        <p:txBody>
-          <a:bodyPr wrap="square">
-            <a:spAutoFit/>
-          </a:bodyPr>
-          <a:lstStyle/>
-          <a:p>
-            <a:pPr algn="l">
-              <a:defRPr sz="2800" b="1">
-                <a:solidFill>
-                  <a:srgbClr val="1A1A1A"/>
-                </a:solidFill>
-                <a:latin typeface="Calibri"/>
-              </a:defRPr>
-            </a:pPr>
-            <a:r>
-              <a:t>343</a:t>
-            </a:r>
-          </a:p>
-        </p:txBody>
-      </p:sp>
-      <p:sp>
-        <p:nvSpPr>
-          <p:cNvPr id="9" name="TextBox 8"/>
-          <p:cNvSpPr txBox="1"/>
-          <p:nvPr/>
-        </p:nvSpPr>
-        <p:spPr>
-          <a:xfrm>
-            <a:off x="2377440" y="1188720"/>
-            <a:ext cx="1828800" cy="365760"/>
-          </a:xfrm>
-          <a:prstGeom prst="rect">
-            <a:avLst/>
-          </a:prstGeom>
-          <a:noFill/>
-        </p:spPr>
-        <p:txBody>
-          <a:bodyPr wrap="square">
-            <a:spAutoFit/>
-          </a:bodyPr>
-          <a:lstStyle/>
-          <a:p>
-            <a:pPr algn="l">
-              <a:defRPr sz="1200" b="0">
-                <a:solidFill>
-                  <a:srgbClr val="5C5C5C"/>
-                </a:solidFill>
-                <a:latin typeface="Calibri"/>
-              </a:defRPr>
-            </a:pPr>
-            <a:r>
-              <a:t>With Data</a:t>
-            </a:r>
-          </a:p>
-        </p:txBody>
-      </p:sp>
-      <p:sp>
-        <p:nvSpPr>
-          <p:cNvPr id="10" name="TextBox 9"/>
-          <p:cNvSpPr txBox="1"/>
-          <p:nvPr/>
-        </p:nvSpPr>
-        <p:spPr>
-          <a:xfrm>
-            <a:off x="2377440" y="1463040"/>
-            <a:ext cx="1828800" cy="548640"/>
-          </a:xfrm>
-          <a:prstGeom prst="rect">
-            <a:avLst/>
-          </a:prstGeom>
-          <a:noFill/>
-        </p:spPr>
-        <p:txBody>
-          <a:bodyPr wrap="square">
-            <a:spAutoFit/>
-          </a:bodyPr>
-          <a:lstStyle/>
-          <a:p>
-            <a:pPr algn="l">
-              <a:defRPr sz="2800" b="1">
-                <a:solidFill>
-                  <a:srgbClr val="1A1A1A"/>
-                </a:solidFill>
-                <a:latin typeface="Calibri"/>
-              </a:defRPr>
-            </a:pPr>
-            <a:r>
-              <a:t>100</a:t>
-            </a:r>
-          </a:p>
-        </p:txBody>
-      </p:sp>
-      <p:sp>
-        <p:nvSpPr>
-          <p:cNvPr id="11" name="TextBox 10"/>
-          <p:cNvSpPr txBox="1"/>
-          <p:nvPr/>
-        </p:nvSpPr>
-        <p:spPr>
-          <a:xfrm>
-            <a:off x="4297680" y="1188720"/>
-            <a:ext cx="1828800" cy="365760"/>
-          </a:xfrm>
-          <a:prstGeom prst="rect">
-            <a:avLst/>
-          </a:prstGeom>
-          <a:noFill/>
-        </p:spPr>
-        <p:txBody>
-          <a:bodyPr wrap="square">
-            <a:spAutoFit/>
-          </a:bodyPr>
-          <a:lstStyle/>
-          <a:p>
-            <a:pPr algn="l">
-              <a:defRPr sz="1200" b="0">
-                <a:solidFill>
-                  <a:srgbClr val="5C5C5C"/>
-                </a:solidFill>
-                <a:latin typeface="Calibri"/>
-              </a:defRPr>
-            </a:pPr>
-            <a:r>
-              <a:t>Eligible</a:t>
-            </a:r>
-          </a:p>
-        </p:txBody>
-      </p:sp>
-      <p:sp>
-        <p:nvSpPr>
-          <p:cNvPr id="12" name="TextBox 11"/>
-          <p:cNvSpPr txBox="1"/>
-          <p:nvPr/>
-        </p:nvSpPr>
-        <p:spPr>
-          <a:xfrm>
-            <a:off x="4297680" y="1463040"/>
-            <a:ext cx="1828800" cy="548640"/>
-          </a:xfrm>
-          <a:prstGeom prst="rect">
-            <a:avLst/>
-          </a:prstGeom>
-          <a:noFill/>
-        </p:spPr>
-        <p:txBody>
-          <a:bodyPr wrap="square">
-            <a:spAutoFit/>
-          </a:bodyPr>
-          <a:lstStyle/>
-          <a:p>
-            <a:pPr algn="l">
-              <a:defRPr sz="2800" b="1">
-                <a:solidFill>
-                  <a:srgbClr val="1A1A1A"/>
-                </a:solidFill>
-                <a:latin typeface="Calibri"/>
-              </a:defRPr>
-            </a:pPr>
-            <a:r>
-              <a:t>25</a:t>
-            </a:r>
-          </a:p>
-        </p:txBody>
-      </p:sp>
-      <p:sp>
-        <p:nvSpPr>
-          <p:cNvPr id="13" name="TextBox 12"/>
-          <p:cNvSpPr txBox="1"/>
-          <p:nvPr/>
-        </p:nvSpPr>
-        <p:spPr>
-          <a:xfrm>
-            <a:off x="6217920" y="1188720"/>
-            <a:ext cx="1828800" cy="365760"/>
-          </a:xfrm>
-          <a:prstGeom prst="rect">
-            <a:avLst/>
-          </a:prstGeom>
-          <a:noFill/>
-        </p:spPr>
-        <p:txBody>
-          <a:bodyPr wrap="square">
-            <a:spAutoFit/>
-          </a:bodyPr>
-          <a:lstStyle/>
-          <a:p>
-            <a:pPr algn="l">
-              <a:defRPr sz="1200" b="0">
-                <a:solidFill>
-                  <a:srgbClr val="5C5C5C"/>
-                </a:solidFill>
-                <a:latin typeface="Calibri"/>
-              </a:defRPr>
-            </a:pPr>
-            <a:r>
-              <a:t>Participants</a:t>
-            </a:r>
-          </a:p>
-        </p:txBody>
-      </p:sp>
-      <p:sp>
-        <p:nvSpPr>
-          <p:cNvPr id="14" name="TextBox 13"/>
-          <p:cNvSpPr txBox="1"/>
-          <p:nvPr/>
-        </p:nvSpPr>
-        <p:spPr>
-          <a:xfrm>
-            <a:off x="6217920" y="1463040"/>
-            <a:ext cx="1828800" cy="548640"/>
-          </a:xfrm>
-          <a:prstGeom prst="rect">
-            <a:avLst/>
-          </a:prstGeom>
-          <a:noFill/>
-        </p:spPr>
-        <p:txBody>
-          <a:bodyPr wrap="square">
-            <a:spAutoFit/>
-          </a:bodyPr>
-          <a:lstStyle/>
-          <a:p>
-            <a:pPr algn="l">
-              <a:defRPr sz="2800" b="1">
-                <a:solidFill>
-                  <a:srgbClr val="1A1A1A"/>
-                </a:solidFill>
-                <a:latin typeface="Calibri"/>
-              </a:defRPr>
-            </a:pPr>
-            <a:r>
-              <a:t>256,055</a:t>
-            </a:r>
-          </a:p>
-        </p:txBody>
-      </p:sp>
-      <p:sp>
-        <p:nvSpPr>
-          <p:cNvPr id="15" name="TextBox 14"/>
-          <p:cNvSpPr txBox="1"/>
-          <p:nvPr/>
-        </p:nvSpPr>
-        <p:spPr>
-          <a:xfrm>
-            <a:off x="8138160" y="1188720"/>
-            <a:ext cx="1828800" cy="365760"/>
-          </a:xfrm>
-          <a:prstGeom prst="rect">
-            <a:avLst/>
-          </a:prstGeom>
-          <a:noFill/>
-        </p:spPr>
-        <p:txBody>
-          <a:bodyPr wrap="square">
-            <a:spAutoFit/>
-          </a:bodyPr>
-          <a:lstStyle/>
-          <a:p>
-            <a:pPr algn="l">
-              <a:defRPr sz="1200" b="0">
-                <a:solidFill>
-                  <a:srgbClr val="5C5C5C"/>
-                </a:solidFill>
-                <a:latin typeface="Calibri"/>
-              </a:defRPr>
-            </a:pPr>
-            <a:r>
-              <a:t>Bias Score</a:t>
-            </a:r>
-          </a:p>
-        </p:txBody>
-      </p:sp>
-      <p:sp>
-        <p:nvSpPr>
-          <p:cNvPr id="16" name="TextBox 15"/>
-          <p:cNvSpPr txBox="1"/>
-          <p:nvPr/>
-        </p:nvSpPr>
-        <p:spPr>
-          <a:xfrm>
-            <a:off x="8138160" y="1463040"/>
-            <a:ext cx="1828800" cy="548640"/>
-          </a:xfrm>
-          <a:prstGeom prst="rect">
-            <a:avLst/>
-          </a:prstGeom>
-          <a:noFill/>
-        </p:spPr>
-        <p:txBody>
-          <a:bodyPr wrap="square">
-            <a:spAutoFit/>
-          </a:bodyPr>
-          <a:lstStyle/>
-          <a:p>
-            <a:pPr algn="l">
-              <a:defRPr sz="2800" b="1">
-                <a:solidFill>
-                  <a:srgbClr val="1A1A1A"/>
-                </a:solidFill>
-                <a:latin typeface="Calibri"/>
-              </a:defRPr>
-            </a:pPr>
-            <a:r>
-              <a:t>79%</a:t>
-            </a:r>
-          </a:p>
-        </p:txBody>
-      </p:sp>
-      <p:sp>
-        <p:nvSpPr>
-          <p:cNvPr id="17" name="TextBox 16"/>
-          <p:cNvSpPr txBox="1"/>
-          <p:nvPr/>
-        </p:nvSpPr>
-        <p:spPr>
-          <a:xfrm>
-            <a:off x="457200" y="2286000"/>
-            <a:ext cx="4572000" cy="365760"/>
-          </a:xfrm>
-          <a:prstGeom prst="rect">
-            <a:avLst/>
-          </a:prstGeom>
-          <a:noFill/>
-        </p:spPr>
-        <p:txBody>
-          <a:bodyPr wrap="square">
-            <a:spAutoFit/>
-          </a:bodyPr>
-          <a:lstStyle/>
-          <a:p>
-            <a:pPr algn="l">
-              <a:defRPr sz="1800" b="1">
-                <a:solidFill>
-                  <a:srgbClr val="9B1B30"/>
-                </a:solidFill>
-                <a:latin typeface="Calibri"/>
-              </a:defRPr>
-            </a:pPr>
-            <a:r>
-              <a:t>Demographic Reporting</a:t>
-            </a:r>
-          </a:p>
-        </p:txBody>
-      </p:sp>
-      <p:sp>
-        <p:nvSpPr>
-          <p:cNvPr id="18" name="Rectangle 17"/>
-          <p:cNvSpPr/>
-          <p:nvPr/>
-        </p:nvSpPr>
-        <p:spPr>
-          <a:xfrm>
-            <a:off x="457200" y="2697480"/>
-            <a:ext cx="4572000" cy="18288"/>
-          </a:xfrm>
-          <a:prstGeom prst="rect">
-            <a:avLst/>
-          </a:prstGeom>
-          <a:solidFill>
-            <a:srgbClr val="9B1B30"/>
-          </a:solidFill>
-          <a:ln>
-            <a:noFill/>
-          </a:ln>
-        </p:spPr>
-        <p:style>
-          <a:lnRef idx="1">
-            <a:schemeClr val="accent1"/>
-          </a:lnRef>
-          <a:fillRef idx="3">
-            <a:schemeClr val="accent1"/>
-          </a:fillRef>
-          <a:effectRef idx="2">
-            <a:schemeClr val="accent1"/>
-          </a:effectRef>
-          <a:fontRef idx="minor">
-            <a:schemeClr val="lt1"/>
-          </a:fontRef>
-        </p:style>
-        <p:txBody>
-          <a:bodyPr rtlCol="0" anchor="ctr"/>
-          <a:lstStyle/>
-          <a:p>
-            <a:pPr algn="ctr"/>
-          </a:p>
-        </p:txBody>
-      </p:sp>
-      <p:graphicFrame>
-        <p:nvGraphicFramePr>
-          <p:cNvPr id="19" name="Table 18"/>
-          <p:cNvGraphicFramePr>
-            <a:graphicFrameLocks noGrp="1"/>
-          </p:cNvGraphicFramePr>
-          <p:nvPr/>
-        </p:nvGraphicFramePr>
-        <p:xfrm>
-          <a:off x="457200" y="2834640"/>
-          <a:ext cx="5029200" cy="1828800"/>
-        </p:xfrm>
-        <a:graphic>
-          <a:graphicData uri="http://schemas.openxmlformats.org/drawingml/2006/table">
-            <a:tbl>
-              <a:tblPr firstRow="1" bandRow="1">
-                <a:tableStyleId>{5C22544A-7EE6-4342-B048-85BDC9FD1C3A}</a:tableStyleId>
-              </a:tblPr>
-              <a:tblGrid>
-                <a:gridCol w="2286000"/>
-                <a:gridCol w="1371600"/>
-                <a:gridCol w="1371600"/>
-              </a:tblGrid>
-              <a:tr h="457200">
-                <a:tc>
-                  <a:txBody>
-                    <a:bodyPr/>
-                    <a:lstStyle/>
-                    <a:p>
-                      <a:pPr>
-                        <a:defRPr sz="1200" b="1">
-                          <a:solidFill>
-                            <a:srgbClr val="FFFFFF"/>
-                          </a:solidFill>
-                        </a:defRPr>
-                      </a:pPr>
-                      <a:r>
-                        <a:t>Metric</a:t>
-                      </a:r>
-                    </a:p>
-                  </a:txBody>
-                  <a:tcPr>
-                    <a:solidFill>
-                      <a:srgbClr val="1A1A1A"/>
-                    </a:solidFill>
-                  </a:tcPr>
-                </a:tc>
-                <a:tc>
-                  <a:txBody>
-                    <a:bodyPr/>
-                    <a:lstStyle/>
-                    <a:p>
-                      <a:pPr>
-                        <a:defRPr sz="1200" b="1">
-                          <a:solidFill>
-                            <a:srgbClr val="FFFFFF"/>
-                          </a:solidFill>
-                        </a:defRPr>
-                      </a:pPr>
-                      <a:r>
-                        <a:t>n</a:t>
-                      </a:r>
-                    </a:p>
-                  </a:txBody>
-                  <a:tcPr>
-                    <a:solidFill>
-                      <a:srgbClr val="1A1A1A"/>
-                    </a:solidFill>
-                  </a:tcPr>
-                </a:tc>
-                <a:tc>
-                  <a:txBody>
-                    <a:bodyPr/>
-                    <a:lstStyle/>
-                    <a:p>
-                      <a:pPr>
-                        <a:defRPr sz="1200" b="1">
-                          <a:solidFill>
-                            <a:srgbClr val="FFFFFF"/>
-                          </a:solidFill>
-                        </a:defRPr>
-                      </a:pPr>
-                      <a:r>
-                        <a:t>%</a:t>
-                      </a:r>
-                    </a:p>
-                  </a:txBody>
-                  <a:tcPr>
-                    <a:solidFill>
-                      <a:srgbClr val="1A1A1A"/>
-                    </a:solidFill>
-                  </a:tcPr>
-                </a:tc>
-              </a:tr>
-              <a:tr h="457200">
-                <a:tc>
-                  <a:txBody>
-                    <a:bodyPr/>
-                    <a:lstStyle/>
-                    <a:p>
-                      <a:pPr algn="l">
-                        <a:defRPr sz="1200">
-                          <a:solidFill>
-                            <a:srgbClr val="1A1A1A"/>
-                          </a:solidFill>
-                        </a:defRPr>
-                      </a:pPr>
-                      <a:r>
-                        <a:t>Sex Reported (both)</a:t>
-                      </a:r>
-                    </a:p>
-                  </a:txBody>
-                  <a:tcPr/>
-                </a:tc>
-                <a:tc>
-                  <a:txBody>
-                    <a:bodyPr/>
-                    <a:lstStyle/>
-                    <a:p>
-                      <a:pPr algn="ctr">
-                        <a:defRPr sz="1200">
-                          <a:solidFill>
-                            <a:srgbClr val="1A1A1A"/>
-                          </a:solidFill>
-                        </a:defRPr>
-                      </a:pPr>
-                      <a:r>
-                        <a:t>n/a</a:t>
-                      </a:r>
-                    </a:p>
-                  </a:txBody>
-                  <a:tcPr/>
-                </a:tc>
-                <a:tc>
-                  <a:txBody>
-                    <a:bodyPr/>
-                    <a:lstStyle/>
-                    <a:p>
-                      <a:pPr algn="ctr">
-                        <a:defRPr sz="1200">
-                          <a:solidFill>
-                            <a:srgbClr val="1A1A1A"/>
-                          </a:solidFill>
-                        </a:defRPr>
-                      </a:pPr>
-                      <a:r>
-                        <a:t>4%</a:t>
-                      </a:r>
-                    </a:p>
-                  </a:txBody>
-                  <a:tcPr/>
-                </a:tc>
-              </a:tr>
-              <a:tr h="457200">
-                <a:tc>
-                  <a:txBody>
-                    <a:bodyPr/>
-                    <a:lstStyle/>
-                    <a:p>
-                      <a:pPr algn="l">
-                        <a:defRPr sz="1200">
-                          <a:solidFill>
-                            <a:srgbClr val="1A1A1A"/>
-                          </a:solidFill>
-                        </a:defRPr>
-                      </a:pPr>
-                      <a:r>
-                        <a:t>Any Race Reported</a:t>
-                      </a:r>
-                    </a:p>
-                  </a:txBody>
-                  <a:tcPr/>
-                </a:tc>
-                <a:tc>
-                  <a:txBody>
-                    <a:bodyPr/>
-                    <a:lstStyle/>
-                    <a:p>
-                      <a:pPr algn="ctr">
-                        <a:defRPr sz="1200">
-                          <a:solidFill>
-                            <a:srgbClr val="1A1A1A"/>
-                          </a:solidFill>
-                        </a:defRPr>
-                      </a:pPr>
-                      <a:r>
-                        <a:t>1</a:t>
-                      </a:r>
-                    </a:p>
-                  </a:txBody>
-                  <a:tcPr/>
-                </a:tc>
-                <a:tc>
-                  <a:txBody>
-                    <a:bodyPr/>
-                    <a:lstStyle/>
-                    <a:p>
-                      <a:pPr algn="ctr">
-                        <a:defRPr sz="1200">
-                          <a:solidFill>
-                            <a:srgbClr val="1A1A1A"/>
-                          </a:solidFill>
-                        </a:defRPr>
-                      </a:pPr>
-                      <a:r>
-                        <a:t>4%</a:t>
-                      </a:r>
-                    </a:p>
-                  </a:txBody>
-                  <a:tcPr/>
-                </a:tc>
-              </a:tr>
-              <a:tr h="457200">
-                <a:tc>
-                  <a:txBody>
-                    <a:bodyPr/>
-                    <a:lstStyle/>
-                    <a:p>
-                      <a:pPr algn="l">
-                        <a:defRPr sz="1200">
-                          <a:solidFill>
-                            <a:srgbClr val="1A1A1A"/>
-                          </a:solidFill>
-                        </a:defRPr>
-                      </a:pPr>
-                      <a:r>
-                        <a:t>USA Studies</a:t>
-                      </a:r>
-                    </a:p>
-                  </a:txBody>
-                  <a:tcPr/>
-                </a:tc>
-                <a:tc>
-                  <a:txBody>
-                    <a:bodyPr/>
-                    <a:lstStyle/>
-                    <a:p>
-                      <a:pPr algn="ctr">
-                        <a:defRPr sz="1200">
-                          <a:solidFill>
-                            <a:srgbClr val="1A1A1A"/>
-                          </a:solidFill>
-                        </a:defRPr>
-                      </a:pPr>
-                      <a:r>
-                        <a:t>n/a</a:t>
-                      </a:r>
-                    </a:p>
-                  </a:txBody>
-                  <a:tcPr/>
-                </a:tc>
-                <a:tc>
-                  <a:txBody>
-                    <a:bodyPr/>
-                    <a:lstStyle/>
-                    <a:p>
-                      <a:pPr algn="ctr">
-                        <a:defRPr sz="1200">
-                          <a:solidFill>
-                            <a:srgbClr val="1A1A1A"/>
-                          </a:solidFill>
-                        </a:defRPr>
-                      </a:pPr>
-                      <a:r>
-                        <a:t>52%</a:t>
-                      </a:r>
-                    </a:p>
-                  </a:txBody>
-                  <a:tcPr/>
-                </a:tc>
-              </a:tr>
-            </a:tbl>
-          </a:graphicData>
-        </a:graphic>
-      </p:graphicFrame>
-      <p:sp>
-        <p:nvSpPr>
-          <p:cNvPr id="20" name="TextBox 19"/>
-          <p:cNvSpPr txBox="1"/>
-          <p:nvPr/>
-        </p:nvSpPr>
-        <p:spPr>
-          <a:xfrm>
-            <a:off x="5943600" y="2286000"/>
-            <a:ext cx="5486400" cy="365760"/>
-          </a:xfrm>
-          <a:prstGeom prst="rect">
-            <a:avLst/>
-          </a:prstGeom>
-          <a:noFill/>
-        </p:spPr>
-        <p:txBody>
-          <a:bodyPr wrap="square">
-            <a:spAutoFit/>
-          </a:bodyPr>
-          <a:lstStyle/>
-          <a:p>
-            <a:pPr algn="l">
-              <a:defRPr sz="1800" b="1">
-                <a:solidFill>
-                  <a:srgbClr val="9B1B30"/>
-                </a:solidFill>
-                <a:latin typeface="Calibri"/>
-              </a:defRPr>
-            </a:pPr>
-            <a:r>
-              <a:t>Race Distribution (Mean %)</a:t>
-            </a:r>
-          </a:p>
-        </p:txBody>
-      </p:sp>
-      <p:sp>
-        <p:nvSpPr>
-          <p:cNvPr id="21" name="Rectangle 20"/>
-          <p:cNvSpPr/>
-          <p:nvPr/>
-        </p:nvSpPr>
-        <p:spPr>
-          <a:xfrm>
-            <a:off x="5943600" y="2697480"/>
-            <a:ext cx="4572000" cy="18288"/>
-          </a:xfrm>
-          <a:prstGeom prst="rect">
-            <a:avLst/>
-          </a:prstGeom>
-          <a:solidFill>
-            <a:srgbClr val="9B1B30"/>
-          </a:solidFill>
-          <a:ln>
-            <a:noFill/>
-          </a:ln>
-        </p:spPr>
-        <p:style>
-          <a:lnRef idx="1">
-            <a:schemeClr val="accent1"/>
-          </a:lnRef>
-          <a:fillRef idx="3">
-            <a:schemeClr val="accent1"/>
-          </a:fillRef>
-          <a:effectRef idx="2">
-            <a:schemeClr val="accent1"/>
-          </a:effectRef>
-          <a:fontRef idx="minor">
-            <a:schemeClr val="lt1"/>
-          </a:fontRef>
-        </p:style>
-        <p:txBody>
-          <a:bodyPr rtlCol="0" anchor="ctr"/>
-          <a:lstStyle/>
-          <a:p>
-            <a:pPr algn="ctr"/>
-          </a:p>
-        </p:txBody>
-      </p:sp>
-      <p:sp>
-        <p:nvSpPr>
-          <p:cNvPr id="22" name="TextBox 21"/>
-          <p:cNvSpPr txBox="1"/>
-          <p:nvPr/>
-        </p:nvSpPr>
-        <p:spPr>
-          <a:xfrm>
-            <a:off x="5943600" y="2926080"/>
-            <a:ext cx="1097280" cy="365760"/>
-          </a:xfrm>
-          <a:prstGeom prst="rect">
-            <a:avLst/>
-          </a:prstGeom>
-          <a:noFill/>
-        </p:spPr>
-        <p:txBody>
-          <a:bodyPr wrap="square">
-            <a:spAutoFit/>
-          </a:bodyPr>
-          <a:lstStyle/>
-          <a:p>
-            <a:pPr algn="l">
-              <a:defRPr sz="1300" b="0">
-                <a:solidFill>
-                  <a:srgbClr val="1A1A1A"/>
-                </a:solidFill>
-                <a:latin typeface="Calibri"/>
-              </a:defRPr>
-            </a:pPr>
-            <a:r>
-              <a:t>White</a:t>
-            </a:r>
-          </a:p>
-        </p:txBody>
-      </p:sp>
-      <p:sp>
-        <p:nvSpPr>
-          <p:cNvPr id="23" name="Rectangle 22"/>
-          <p:cNvSpPr/>
-          <p:nvPr/>
-        </p:nvSpPr>
-        <p:spPr>
-          <a:xfrm>
-            <a:off x="7132320" y="2971800"/>
-            <a:ext cx="4465929" cy="274320"/>
-          </a:xfrm>
-          <a:prstGeom prst="rect">
-            <a:avLst/>
-          </a:prstGeom>
-          <a:solidFill>
-            <a:srgbClr val="9B1B30"/>
-          </a:solidFill>
-          <a:ln>
-            <a:noFill/>
-          </a:ln>
-        </p:spPr>
-        <p:style>
-          <a:lnRef idx="1">
-            <a:schemeClr val="accent1"/>
-          </a:lnRef>
-          <a:fillRef idx="3">
-            <a:schemeClr val="accent1"/>
-          </a:fillRef>
-          <a:effectRef idx="2">
-            <a:schemeClr val="accent1"/>
-          </a:effectRef>
-          <a:fontRef idx="minor">
-            <a:schemeClr val="lt1"/>
-          </a:fontRef>
-        </p:style>
-        <p:txBody>
-          <a:bodyPr rtlCol="0" anchor="ctr"/>
-          <a:lstStyle/>
-          <a:p>
-            <a:pPr algn="ctr"/>
-          </a:p>
-        </p:txBody>
-      </p:sp>
-      <p:sp>
-        <p:nvSpPr>
-          <p:cNvPr id="24" name="TextBox 23"/>
-          <p:cNvSpPr txBox="1"/>
-          <p:nvPr/>
-        </p:nvSpPr>
-        <p:spPr>
-          <a:xfrm>
-            <a:off x="11689689" y="2926080"/>
-            <a:ext cx="1371600" cy="365760"/>
-          </a:xfrm>
-          <a:prstGeom prst="rect">
-            <a:avLst/>
-          </a:prstGeom>
-          <a:noFill/>
-        </p:spPr>
-        <p:txBody>
-          <a:bodyPr wrap="square">
-            <a:spAutoFit/>
-          </a:bodyPr>
-          <a:lstStyle/>
-          <a:p>
-            <a:pPr algn="l">
-              <a:defRPr sz="1200" b="0">
-                <a:solidFill>
-                  <a:srgbClr val="5C5C5C"/>
-                </a:solidFill>
-                <a:latin typeface="Calibri"/>
-              </a:defRPr>
-            </a:pPr>
-            <a:r>
-              <a:t>88.8%</a:t>
-            </a:r>
-          </a:p>
-        </p:txBody>
-      </p:sp>
-      <p:sp>
-        <p:nvSpPr>
-          <p:cNvPr id="25" name="TextBox 24"/>
-          <p:cNvSpPr txBox="1"/>
-          <p:nvPr/>
-        </p:nvSpPr>
-        <p:spPr>
-          <a:xfrm>
-            <a:off x="5943600" y="3474720"/>
-            <a:ext cx="1097280" cy="365760"/>
-          </a:xfrm>
-          <a:prstGeom prst="rect">
-            <a:avLst/>
-          </a:prstGeom>
-          <a:noFill/>
-        </p:spPr>
-        <p:txBody>
-          <a:bodyPr wrap="square">
-            <a:spAutoFit/>
-          </a:bodyPr>
-          <a:lstStyle/>
-          <a:p>
-            <a:pPr algn="l">
-              <a:defRPr sz="1300" b="0">
-                <a:solidFill>
-                  <a:srgbClr val="1A1A1A"/>
-                </a:solidFill>
-                <a:latin typeface="Calibri"/>
-              </a:defRPr>
-            </a:pPr>
-            <a:r>
-              <a:t>Black</a:t>
-            </a:r>
-          </a:p>
-        </p:txBody>
-      </p:sp>
-      <p:sp>
-        <p:nvSpPr>
-          <p:cNvPr id="26" name="Rectangle 25"/>
-          <p:cNvSpPr/>
-          <p:nvPr/>
-        </p:nvSpPr>
-        <p:spPr>
-          <a:xfrm>
-            <a:off x="7132320" y="3520440"/>
-            <a:ext cx="2313432" cy="274320"/>
-          </a:xfrm>
-          <a:prstGeom prst="rect">
-            <a:avLst/>
-          </a:prstGeom>
-          <a:solidFill>
-            <a:srgbClr val="DC143C"/>
-          </a:solidFill>
-          <a:ln>
-            <a:noFill/>
-          </a:ln>
-        </p:spPr>
-        <p:style>
-          <a:lnRef idx="1">
-            <a:schemeClr val="accent1"/>
-          </a:lnRef>
-          <a:fillRef idx="3">
-            <a:schemeClr val="accent1"/>
-          </a:fillRef>
-          <a:effectRef idx="2">
-            <a:schemeClr val="accent1"/>
-          </a:effectRef>
-          <a:fontRef idx="minor">
-            <a:schemeClr val="lt1"/>
-          </a:fontRef>
-        </p:style>
-        <p:txBody>
-          <a:bodyPr rtlCol="0" anchor="ctr"/>
-          <a:lstStyle/>
-          <a:p>
-            <a:pPr algn="ctr"/>
-          </a:p>
-        </p:txBody>
-      </p:sp>
-      <p:sp>
-        <p:nvSpPr>
-          <p:cNvPr id="27" name="TextBox 26"/>
-          <p:cNvSpPr txBox="1"/>
-          <p:nvPr/>
-        </p:nvSpPr>
-        <p:spPr>
-          <a:xfrm>
-            <a:off x="9537192" y="3474720"/>
-            <a:ext cx="1371600" cy="365760"/>
-          </a:xfrm>
-          <a:prstGeom prst="rect">
-            <a:avLst/>
-          </a:prstGeom>
-          <a:noFill/>
-        </p:spPr>
-        <p:txBody>
-          <a:bodyPr wrap="square">
-            <a:spAutoFit/>
-          </a:bodyPr>
-          <a:lstStyle/>
-          <a:p>
-            <a:pPr algn="l">
-              <a:defRPr sz="1200" b="0">
-                <a:solidFill>
-                  <a:srgbClr val="5C5C5C"/>
-                </a:solidFill>
-                <a:latin typeface="Calibri"/>
-              </a:defRPr>
-            </a:pPr>
-            <a:r>
-              <a:t>46.0%</a:t>
-            </a:r>
-          </a:p>
-        </p:txBody>
-      </p:sp>
-      <p:sp>
-        <p:nvSpPr>
-          <p:cNvPr id="28" name="TextBox 27"/>
-          <p:cNvSpPr txBox="1"/>
-          <p:nvPr/>
-        </p:nvSpPr>
-        <p:spPr>
-          <a:xfrm>
-            <a:off x="5943600" y="4023360"/>
-            <a:ext cx="1097280" cy="365760"/>
-          </a:xfrm>
-          <a:prstGeom prst="rect">
-            <a:avLst/>
-          </a:prstGeom>
-          <a:noFill/>
-        </p:spPr>
-        <p:txBody>
-          <a:bodyPr wrap="square">
-            <a:spAutoFit/>
-          </a:bodyPr>
-          <a:lstStyle/>
-          <a:p>
-            <a:pPr algn="l">
-              <a:defRPr sz="1300" b="0">
-                <a:solidFill>
-                  <a:srgbClr val="1A1A1A"/>
-                </a:solidFill>
-                <a:latin typeface="Calibri"/>
-              </a:defRPr>
-            </a:pPr>
-            <a:r>
-              <a:t>Hispanic</a:t>
-            </a:r>
-          </a:p>
-        </p:txBody>
-      </p:sp>
-      <p:sp>
-        <p:nvSpPr>
-          <p:cNvPr id="29" name="Rectangle 28"/>
-          <p:cNvSpPr/>
-          <p:nvPr/>
-        </p:nvSpPr>
-        <p:spPr>
-          <a:xfrm>
-            <a:off x="7132320" y="4069080"/>
-            <a:ext cx="4797856" cy="274320"/>
-          </a:xfrm>
-          <a:prstGeom prst="rect">
-            <a:avLst/>
-          </a:prstGeom>
-          <a:solidFill>
-            <a:srgbClr val="1A1A1A"/>
-          </a:solidFill>
-          <a:ln>
-            <a:noFill/>
-          </a:ln>
-        </p:spPr>
-        <p:style>
-          <a:lnRef idx="1">
-            <a:schemeClr val="accent1"/>
-          </a:lnRef>
-          <a:fillRef idx="3">
-            <a:schemeClr val="accent1"/>
-          </a:fillRef>
-          <a:effectRef idx="2">
-            <a:schemeClr val="accent1"/>
-          </a:effectRef>
-          <a:fontRef idx="minor">
-            <a:schemeClr val="lt1"/>
-          </a:fontRef>
-        </p:style>
-        <p:txBody>
-          <a:bodyPr rtlCol="0" anchor="ctr"/>
-          <a:lstStyle/>
-          <a:p>
-            <a:pPr algn="ctr"/>
-          </a:p>
-        </p:txBody>
-      </p:sp>
-      <p:sp>
-        <p:nvSpPr>
-          <p:cNvPr id="30" name="TextBox 29"/>
-          <p:cNvSpPr txBox="1"/>
-          <p:nvPr/>
-        </p:nvSpPr>
-        <p:spPr>
-          <a:xfrm>
-            <a:off x="12021616" y="4023360"/>
-            <a:ext cx="1371600" cy="365760"/>
-          </a:xfrm>
-          <a:prstGeom prst="rect">
-            <a:avLst/>
-          </a:prstGeom>
-          <a:noFill/>
-        </p:spPr>
-        <p:txBody>
-          <a:bodyPr wrap="square">
-            <a:spAutoFit/>
-          </a:bodyPr>
-          <a:lstStyle/>
-          <a:p>
-            <a:pPr algn="l">
-              <a:defRPr sz="1200" b="0">
-                <a:solidFill>
-                  <a:srgbClr val="5C5C5C"/>
-                </a:solidFill>
-                <a:latin typeface="Calibri"/>
-              </a:defRPr>
-            </a:pPr>
-            <a:r>
-              <a:t>95.4%</a:t>
-            </a:r>
-          </a:p>
-        </p:txBody>
-      </p:sp>
-      <p:sp>
-        <p:nvSpPr>
-          <p:cNvPr id="31" name="TextBox 30"/>
-          <p:cNvSpPr txBox="1"/>
-          <p:nvPr/>
-        </p:nvSpPr>
-        <p:spPr>
-          <a:xfrm>
-            <a:off x="5943600" y="4572000"/>
-            <a:ext cx="1097280" cy="365760"/>
-          </a:xfrm>
-          <a:prstGeom prst="rect">
-            <a:avLst/>
-          </a:prstGeom>
-          <a:noFill/>
-        </p:spPr>
-        <p:txBody>
-          <a:bodyPr wrap="square">
-            <a:spAutoFit/>
-          </a:bodyPr>
-          <a:lstStyle/>
-          <a:p>
-            <a:pPr algn="l">
-              <a:defRPr sz="1300" b="0">
-                <a:solidFill>
-                  <a:srgbClr val="1A1A1A"/>
-                </a:solidFill>
-                <a:latin typeface="Calibri"/>
-              </a:defRPr>
-            </a:pPr>
-            <a:r>
-              <a:t>Asian</a:t>
-            </a:r>
-          </a:p>
-        </p:txBody>
-      </p:sp>
-      <p:sp>
-        <p:nvSpPr>
-          <p:cNvPr id="32" name="Rectangle 31"/>
-          <p:cNvSpPr/>
-          <p:nvPr/>
-        </p:nvSpPr>
-        <p:spPr>
-          <a:xfrm>
-            <a:off x="7132320" y="4617720"/>
-            <a:ext cx="603504" cy="274320"/>
-          </a:xfrm>
-          <a:prstGeom prst="rect">
-            <a:avLst/>
-          </a:prstGeom>
-          <a:solidFill>
-            <a:srgbClr val="404040"/>
-          </a:solidFill>
-          <a:ln>
-            <a:noFill/>
-          </a:ln>
-        </p:spPr>
-        <p:style>
-          <a:lnRef idx="1">
-            <a:schemeClr val="accent1"/>
-          </a:lnRef>
-          <a:fillRef idx="3">
-            <a:schemeClr val="accent1"/>
-          </a:fillRef>
-          <a:effectRef idx="2">
-            <a:schemeClr val="accent1"/>
-          </a:effectRef>
-          <a:fontRef idx="minor">
-            <a:schemeClr val="lt1"/>
-          </a:fontRef>
-        </p:style>
-        <p:txBody>
-          <a:bodyPr rtlCol="0" anchor="ctr"/>
-          <a:lstStyle/>
-          <a:p>
-            <a:pPr algn="ctr"/>
-          </a:p>
-        </p:txBody>
-      </p:sp>
-      <p:sp>
-        <p:nvSpPr>
-          <p:cNvPr id="33" name="TextBox 32"/>
-          <p:cNvSpPr txBox="1"/>
-          <p:nvPr/>
-        </p:nvSpPr>
-        <p:spPr>
-          <a:xfrm>
-            <a:off x="7827264" y="4572000"/>
-            <a:ext cx="1371600" cy="365760"/>
-          </a:xfrm>
-          <a:prstGeom prst="rect">
-            <a:avLst/>
-          </a:prstGeom>
-          <a:noFill/>
-        </p:spPr>
-        <p:txBody>
-          <a:bodyPr wrap="square">
-            <a:spAutoFit/>
-          </a:bodyPr>
-          <a:lstStyle/>
-          <a:p>
-            <a:pPr algn="l">
-              <a:defRPr sz="1200" b="0">
-                <a:solidFill>
-                  <a:srgbClr val="5C5C5C"/>
-                </a:solidFill>
-                <a:latin typeface="Calibri"/>
-              </a:defRPr>
-            </a:pPr>
-            <a:r>
-              <a:t>12.0%</a:t>
-            </a:r>
-          </a:p>
-        </p:txBody>
-      </p:sp>
-      <p:sp>
-        <p:nvSpPr>
-          <p:cNvPr id="34" name="TextBox 33"/>
-          <p:cNvSpPr txBox="1"/>
-          <p:nvPr/>
-        </p:nvSpPr>
-        <p:spPr>
-          <a:xfrm>
-            <a:off x="457200" y="4937760"/>
-            <a:ext cx="10972800" cy="1645920"/>
-          </a:xfrm>
-          <a:prstGeom prst="rect">
-            <a:avLst/>
-          </a:prstGeom>
-          <a:noFill/>
-        </p:spPr>
-        <p:txBody>
-          <a:bodyPr wrap="square">
-            <a:spAutoFit/>
-          </a:bodyPr>
-          <a:lstStyle/>
-          <a:p>
-            <a:pPr algn="l">
-              <a:defRPr sz="1100" b="0">
-                <a:solidFill>
-                  <a:srgbClr val="5C5C5C"/>
-                </a:solidFill>
-                <a:latin typeface="Calibri"/>
-              </a:defRPr>
-            </a:pPr>
-            <a:r>
-              <a:t>CLINICAL BIAS ASSESSMENT REPORT</a:t>
-            </a:r>
-          </a:p>
-        </p:txBody>
-      </p:sp>
-      <p:sp>
-        <p:nvSpPr>
-          <p:cNvPr id="35" name="TextBox 34"/>
-          <p:cNvSpPr txBox="1"/>
-          <p:nvPr/>
-        </p:nvSpPr>
-        <p:spPr>
-          <a:xfrm>
-            <a:off x="11155680" y="6400800"/>
-            <a:ext cx="914400" cy="365760"/>
-          </a:xfrm>
-          <a:prstGeom prst="rect">
-            <a:avLst/>
-          </a:prstGeom>
-          <a:noFill/>
-        </p:spPr>
-        <p:txBody>
-          <a:bodyPr wrap="square">
-            <a:spAutoFit/>
-          </a:bodyPr>
-          <a:lstStyle/>
-          <a:p>
-            <a:pPr algn="r">
-              <a:defRPr sz="1000" b="0">
-                <a:solidFill>
-                  <a:srgbClr val="808080"/>
-                </a:solidFill>
-                <a:latin typeface="Calibri"/>
-              </a:defRPr>
-            </a:pPr>
-            <a:r>
-              <a:t>9 / 14</a:t>
+              <a:t>9/15</a:t>
             </a:r>
           </a:p>
         </p:txBody>
